--- a/DAEN460S26/week12.pptx
+++ b/DAEN460S26/week12.pptx
@@ -5,7 +5,7 @@
     <p:sldMasterId id="2147483660" r:id="rId1"/>
   </p:sldMasterIdLst>
   <p:notesMasterIdLst>
-    <p:notesMasterId r:id="rId24"/>
+    <p:notesMasterId r:id="rId25"/>
   </p:notesMasterIdLst>
   <p:sldIdLst>
     <p:sldId id="256" r:id="rId2"/>
@@ -27,9 +27,10 @@
     <p:sldId id="374" r:id="rId18"/>
     <p:sldId id="375" r:id="rId19"/>
     <p:sldId id="376" r:id="rId20"/>
-    <p:sldId id="306" r:id="rId21"/>
-    <p:sldId id="377" r:id="rId22"/>
-    <p:sldId id="334" r:id="rId23"/>
+    <p:sldId id="378" r:id="rId21"/>
+    <p:sldId id="306" r:id="rId22"/>
+    <p:sldId id="377" r:id="rId23"/>
+    <p:sldId id="334" r:id="rId24"/>
   </p:sldIdLst>
   <p:sldSz cx="9144000" cy="6858000" type="screen4x3"/>
   <p:notesSz cx="6858000" cy="9144000"/>
@@ -218,7 +219,7 @@
           <a:p>
             <a:fld id="{9BCFA349-295A-9648-AC81-268E9C74AF3D}" type="datetimeFigureOut">
               <a:rPr lang="en-US" smtClean="0"/>
-              <a:t>4/5/26</a:t>
+              <a:t>4/6/26</a:t>
             </a:fld>
             <a:endParaRPr lang="en-US"/>
           </a:p>
@@ -707,7 +708,7 @@
           <a:p>
             <a:fld id="{71E70913-1F13-4744-B94A-DD1167A56E7D}" type="datetime1">
               <a:rPr lang="en-US" smtClean="0"/>
-              <a:t>4/5/26</a:t>
+              <a:t>4/6/26</a:t>
             </a:fld>
             <a:endParaRPr lang="en-US"/>
           </a:p>
@@ -877,7 +878,7 @@
           <a:p>
             <a:fld id="{26BAC7D1-F120-9444-A8E9-CC8E63B024C0}" type="datetime1">
               <a:rPr lang="en-US" smtClean="0"/>
-              <a:t>4/5/26</a:t>
+              <a:t>4/6/26</a:t>
             </a:fld>
             <a:endParaRPr lang="en-US"/>
           </a:p>
@@ -1057,7 +1058,7 @@
           <a:p>
             <a:fld id="{49D86640-3593-E045-822D-D104552937CC}" type="datetime1">
               <a:rPr lang="en-US" smtClean="0"/>
-              <a:t>4/5/26</a:t>
+              <a:t>4/6/26</a:t>
             </a:fld>
             <a:endParaRPr lang="en-US"/>
           </a:p>
@@ -1242,7 +1243,7 @@
           <a:p>
             <a:fld id="{7F27163F-7EC9-5B47-A192-CB50DE612FED}" type="datetime1">
               <a:rPr lang="en-US" smtClean="0"/>
-              <a:t>4/5/26</a:t>
+              <a:t>4/6/26</a:t>
             </a:fld>
             <a:endParaRPr lang="en-US"/>
           </a:p>
@@ -1504,7 +1505,7 @@
           <a:p>
             <a:fld id="{7734F2BC-3CB7-1146-A19E-4D5E63F3B742}" type="datetime1">
               <a:rPr lang="en-US" smtClean="0"/>
-              <a:t>4/5/26</a:t>
+              <a:t>4/6/26</a:t>
             </a:fld>
             <a:endParaRPr lang="en-US"/>
           </a:p>
@@ -1736,7 +1737,7 @@
           <a:p>
             <a:fld id="{B7F91693-1844-8848-86CC-F923317986AD}" type="datetime1">
               <a:rPr lang="en-US" smtClean="0"/>
-              <a:t>4/5/26</a:t>
+              <a:t>4/6/26</a:t>
             </a:fld>
             <a:endParaRPr lang="en-US"/>
           </a:p>
@@ -2103,7 +2104,7 @@
           <a:p>
             <a:fld id="{42C7BDF2-3CCE-3449-B48D-F4595C3D57FE}" type="datetime1">
               <a:rPr lang="en-US" smtClean="0"/>
-              <a:t>4/5/26</a:t>
+              <a:t>4/6/26</a:t>
             </a:fld>
             <a:endParaRPr lang="en-US"/>
           </a:p>
@@ -2221,7 +2222,7 @@
           <a:p>
             <a:fld id="{9659FDB3-FCD2-A24F-8241-8DA72B16D6B1}" type="datetime1">
               <a:rPr lang="en-US" smtClean="0"/>
-              <a:t>4/5/26</a:t>
+              <a:t>4/6/26</a:t>
             </a:fld>
             <a:endParaRPr lang="en-US"/>
           </a:p>
@@ -2316,7 +2317,7 @@
           <a:p>
             <a:fld id="{006AC91C-CE34-DA4E-B4C2-6B29BDE88023}" type="datetime1">
               <a:rPr lang="en-US" smtClean="0"/>
-              <a:t>4/5/26</a:t>
+              <a:t>4/6/26</a:t>
             </a:fld>
             <a:endParaRPr lang="en-US"/>
           </a:p>
@@ -2593,7 +2594,7 @@
           <a:p>
             <a:fld id="{8DE724E1-3786-E644-95CD-0EC484282321}" type="datetime1">
               <a:rPr lang="en-US" smtClean="0"/>
-              <a:t>4/5/26</a:t>
+              <a:t>4/6/26</a:t>
             </a:fld>
             <a:endParaRPr lang="en-US"/>
           </a:p>
@@ -2850,7 +2851,7 @@
           <a:p>
             <a:fld id="{26DD75EC-C44D-6048-B3A9-C5F04F3202FD}" type="datetime1">
               <a:rPr lang="en-US" smtClean="0"/>
-              <a:t>4/5/26</a:t>
+              <a:t>4/6/26</a:t>
             </a:fld>
             <a:endParaRPr lang="en-US"/>
           </a:p>
@@ -3063,7 +3064,7 @@
           <a:p>
             <a:fld id="{497CE539-832A-BA41-9408-4A63384D7065}" type="datetime1">
               <a:rPr lang="en-US" smtClean="0"/>
-              <a:t>4/5/26</a:t>
+              <a:t>4/6/26</a:t>
             </a:fld>
             <a:endParaRPr lang="en-US"/>
           </a:p>
@@ -5632,6 +5633,181 @@
   <p:cSld>
     <p:spTree>
       <p:nvGrpSpPr>
+        <p:cNvPr id="1" name="">
+          <a:extLst>
+            <a:ext uri="{FF2B5EF4-FFF2-40B4-BE49-F238E27FC236}">
+              <a16:creationId xmlns:a16="http://schemas.microsoft.com/office/drawing/2014/main" id="{0438E1C3-E5D6-CACA-5046-49E8C7F2AE83}"/>
+            </a:ext>
+          </a:extLst>
+        </p:cNvPr>
+        <p:cNvGrpSpPr/>
+        <p:nvPr/>
+      </p:nvGrpSpPr>
+      <p:grpSpPr>
+        <a:xfrm>
+          <a:off x="0" y="0"/>
+          <a:ext cx="0" cy="0"/>
+          <a:chOff x="0" y="0"/>
+          <a:chExt cx="0" cy="0"/>
+        </a:xfrm>
+      </p:grpSpPr>
+      <p:sp>
+        <p:nvSpPr>
+          <p:cNvPr id="6" name="Content Placeholder 5">
+            <a:extLst>
+              <a:ext uri="{FF2B5EF4-FFF2-40B4-BE49-F238E27FC236}">
+                <a16:creationId xmlns:a16="http://schemas.microsoft.com/office/drawing/2014/main" id="{DD0DCDC5-81BC-1522-A4E3-5DFE40510748}"/>
+              </a:ext>
+            </a:extLst>
+          </p:cNvPr>
+          <p:cNvSpPr>
+            <a:spLocks noGrp="1"/>
+          </p:cNvSpPr>
+          <p:nvPr>
+            <p:ph idx="1"/>
+          </p:nvPr>
+        </p:nvSpPr>
+        <p:spPr>
+          <a:xfrm>
+            <a:off x="628650" y="1690689"/>
+            <a:ext cx="7886700" cy="4486274"/>
+          </a:xfrm>
+        </p:spPr>
+        <p:txBody>
+          <a:bodyPr>
+            <a:normAutofit/>
+          </a:bodyPr>
+          <a:lstStyle/>
+          <a:p>
+            <a:pPr marL="0" indent="0">
+              <a:buNone/>
+            </a:pPr>
+            <a:r>
+              <a:rPr lang="en-US" b="1" dirty="0"/>
+              <a:t>ABET Accreditation Alignment</a:t>
+            </a:r>
+          </a:p>
+          <a:p>
+            <a:r>
+              <a:rPr lang="en-US" sz="1600" dirty="0"/>
+              <a:t>Phase 4 presentation and final report must explicitly demonstrate your ability to apply engineering design to produce solutions that meet specified needs!</a:t>
+            </a:r>
+          </a:p>
+          <a:p>
+            <a:pPr lvl="1"/>
+            <a:r>
+              <a:rPr lang="en-US" sz="1600" dirty="0"/>
+              <a:t>Engineering Standards and Project Constraints go beyond just naming a standard (like OSHA or ISO):</a:t>
+            </a:r>
+          </a:p>
+          <a:p>
+            <a:pPr lvl="2"/>
+            <a:r>
+              <a:rPr lang="en-US" sz="1600" dirty="0"/>
+              <a:t>You must explicitly identify the specific standards (e.g., IEEE, ASME, NIST, ISO) that informed your design.</a:t>
+            </a:r>
+          </a:p>
+          <a:p>
+            <a:pPr lvl="2"/>
+            <a:r>
+              <a:rPr lang="en-US" sz="1600" dirty="0"/>
+              <a:t>Clearly state how your design specifically protects the user or the public.</a:t>
+            </a:r>
+          </a:p>
+          <a:p>
+            <a:r>
+              <a:rPr lang="en-US" sz="1600" dirty="0"/>
+              <a:t>Analysis should consider broader impact of your design.</a:t>
+            </a:r>
+          </a:p>
+          <a:p>
+            <a:pPr lvl="1"/>
+            <a:r>
+              <a:rPr lang="en-US" sz="1600" dirty="0"/>
+              <a:t>Address any ethical dilemmas encountered: ensure your narrative reflects informed, ethical decision-making. </a:t>
+            </a:r>
+          </a:p>
+        </p:txBody>
+      </p:sp>
+      <p:sp>
+        <p:nvSpPr>
+          <p:cNvPr id="5" name="Title 4">
+            <a:extLst>
+              <a:ext uri="{FF2B5EF4-FFF2-40B4-BE49-F238E27FC236}">
+                <a16:creationId xmlns:a16="http://schemas.microsoft.com/office/drawing/2014/main" id="{202C533E-E1C9-2F20-FCAA-CAE853E4C328}"/>
+              </a:ext>
+            </a:extLst>
+          </p:cNvPr>
+          <p:cNvSpPr>
+            <a:spLocks noGrp="1"/>
+          </p:cNvSpPr>
+          <p:nvPr>
+            <p:ph type="title"/>
+          </p:nvPr>
+        </p:nvSpPr>
+        <p:spPr/>
+        <p:txBody>
+          <a:bodyPr/>
+          <a:lstStyle/>
+          <a:p>
+            <a:r>
+              <a:rPr lang="en-US" b="1" dirty="0">
+                <a:solidFill>
+                  <a:srgbClr val="C00000"/>
+                </a:solidFill>
+              </a:rPr>
+              <a:t>Phase 4 Presentation Guidelines</a:t>
+            </a:r>
+          </a:p>
+        </p:txBody>
+      </p:sp>
+      <p:sp>
+        <p:nvSpPr>
+          <p:cNvPr id="4" name="Slide Number Placeholder 3">
+            <a:extLst>
+              <a:ext uri="{FF2B5EF4-FFF2-40B4-BE49-F238E27FC236}">
+                <a16:creationId xmlns:a16="http://schemas.microsoft.com/office/drawing/2014/main" id="{DFE42CCC-4FC6-C0F3-FB54-708DE858AD59}"/>
+              </a:ext>
+            </a:extLst>
+          </p:cNvPr>
+          <p:cNvSpPr>
+            <a:spLocks noGrp="1"/>
+          </p:cNvSpPr>
+          <p:nvPr>
+            <p:ph type="sldNum" sz="quarter" idx="12"/>
+          </p:nvPr>
+        </p:nvSpPr>
+        <p:spPr/>
+        <p:txBody>
+          <a:bodyPr/>
+          <a:lstStyle/>
+          <a:p>
+            <a:fld id="{727B0ACA-53D9-FB44-A37C-A778C10B232A}" type="slidenum">
+              <a:rPr lang="en-US" smtClean="0"/>
+              <a:t>20</a:t>
+            </a:fld>
+            <a:endParaRPr lang="en-US"/>
+          </a:p>
+        </p:txBody>
+      </p:sp>
+    </p:spTree>
+    <p:extLst>
+      <p:ext uri="{BB962C8B-B14F-4D97-AF65-F5344CB8AC3E}">
+        <p14:creationId xmlns:p14="http://schemas.microsoft.com/office/powerpoint/2010/main" val="237168614"/>
+      </p:ext>
+    </p:extLst>
+  </p:cSld>
+  <p:clrMapOvr>
+    <a:masterClrMapping/>
+  </p:clrMapOvr>
+</p:sld>
+</file>
+
+<file path=ppt/slides/slide21.xml><?xml version="1.0" encoding="utf-8"?>
+<p:sld xmlns:a="http://schemas.openxmlformats.org/drawingml/2006/main" xmlns:r="http://schemas.openxmlformats.org/officeDocument/2006/relationships" xmlns:p="http://schemas.openxmlformats.org/presentationml/2006/main">
+  <p:cSld>
+    <p:spTree>
+      <p:nvGrpSpPr>
         <p:cNvPr id="1" name=""/>
         <p:cNvGrpSpPr/>
         <p:nvPr/>
@@ -5818,7 +5994,7 @@
           <a:p>
             <a:fld id="{727B0ACA-53D9-FB44-A37C-A778C10B232A}" type="slidenum">
               <a:rPr lang="en-US" smtClean="0"/>
-              <a:t>20</a:t>
+              <a:t>21</a:t>
             </a:fld>
             <a:endParaRPr lang="en-US"/>
           </a:p>
@@ -5837,7 +6013,7 @@
 </p:sld>
 </file>
 
-<file path=ppt/slides/slide21.xml><?xml version="1.0" encoding="utf-8"?>
+<file path=ppt/slides/slide22.xml><?xml version="1.0" encoding="utf-8"?>
 <p:sld xmlns:a="http://schemas.openxmlformats.org/drawingml/2006/main" xmlns:r="http://schemas.openxmlformats.org/officeDocument/2006/relationships" xmlns:p="http://schemas.openxmlformats.org/presentationml/2006/main">
   <p:cSld>
     <p:spTree>
@@ -6017,7 +6193,7 @@
           <a:p>
             <a:fld id="{727B0ACA-53D9-FB44-A37C-A778C10B232A}" type="slidenum">
               <a:rPr lang="en-US" smtClean="0"/>
-              <a:t>21</a:t>
+              <a:t>22</a:t>
             </a:fld>
             <a:endParaRPr lang="en-US"/>
           </a:p>
@@ -6036,7 +6212,7 @@
 </p:sld>
 </file>
 
-<file path=ppt/slides/slide22.xml><?xml version="1.0" encoding="utf-8"?>
+<file path=ppt/slides/slide23.xml><?xml version="1.0" encoding="utf-8"?>
 <p:sld xmlns:a="http://schemas.openxmlformats.org/drawingml/2006/main" xmlns:r="http://schemas.openxmlformats.org/officeDocument/2006/relationships" xmlns:p="http://schemas.openxmlformats.org/presentationml/2006/main">
   <p:cSld>
     <p:bg>
@@ -6090,7 +6266,7 @@
           <a:p>
             <a:fld id="{727B0ACA-53D9-FB44-A37C-A778C10B232A}" type="slidenum">
               <a:rPr lang="en-US" smtClean="0"/>
-              <a:t>22</a:t>
+              <a:t>23</a:t>
             </a:fld>
             <a:endParaRPr lang="en-US"/>
           </a:p>

--- a/DAEN460S26/week12.pptx
+++ b/DAEN460S26/week12.pptx
@@ -11,17 +11,17 @@
     <p:sldId id="256" r:id="rId2"/>
     <p:sldId id="326" r:id="rId3"/>
     <p:sldId id="258" r:id="rId4"/>
-    <p:sldId id="292" r:id="rId5"/>
-    <p:sldId id="293" r:id="rId6"/>
-    <p:sldId id="320" r:id="rId7"/>
-    <p:sldId id="330" r:id="rId8"/>
-    <p:sldId id="328" r:id="rId9"/>
-    <p:sldId id="319" r:id="rId10"/>
-    <p:sldId id="371" r:id="rId11"/>
-    <p:sldId id="361" r:id="rId12"/>
-    <p:sldId id="356" r:id="rId13"/>
-    <p:sldId id="331" r:id="rId14"/>
-    <p:sldId id="332" r:id="rId15"/>
+    <p:sldId id="320" r:id="rId5"/>
+    <p:sldId id="330" r:id="rId6"/>
+    <p:sldId id="328" r:id="rId7"/>
+    <p:sldId id="292" r:id="rId8"/>
+    <p:sldId id="293" r:id="rId9"/>
+    <p:sldId id="371" r:id="rId10"/>
+    <p:sldId id="361" r:id="rId11"/>
+    <p:sldId id="356" r:id="rId12"/>
+    <p:sldId id="319" r:id="rId13"/>
+    <p:sldId id="332" r:id="rId14"/>
+    <p:sldId id="331" r:id="rId15"/>
     <p:sldId id="372" r:id="rId16"/>
     <p:sldId id="373" r:id="rId17"/>
     <p:sldId id="374" r:id="rId18"/>
@@ -219,7 +219,7 @@
           <a:p>
             <a:fld id="{9BCFA349-295A-9648-AC81-268E9C74AF3D}" type="datetimeFigureOut">
               <a:rPr lang="en-US" smtClean="0"/>
-              <a:t>4/6/26</a:t>
+              <a:t>4/7/26</a:t>
             </a:fld>
             <a:endParaRPr lang="en-US"/>
           </a:p>
@@ -558,7 +558,7 @@
           <a:p>
             <a:fld id="{09813196-D6CC-4148-993F-EDD11FE55ECC}" type="slidenum">
               <a:rPr lang="en-US" smtClean="0"/>
-              <a:t>4</a:t>
+              <a:t>7</a:t>
             </a:fld>
             <a:endParaRPr lang="en-US"/>
           </a:p>
@@ -708,7 +708,7 @@
           <a:p>
             <a:fld id="{71E70913-1F13-4744-B94A-DD1167A56E7D}" type="datetime1">
               <a:rPr lang="en-US" smtClean="0"/>
-              <a:t>4/6/26</a:t>
+              <a:t>4/7/26</a:t>
             </a:fld>
             <a:endParaRPr lang="en-US"/>
           </a:p>
@@ -878,7 +878,7 @@
           <a:p>
             <a:fld id="{26BAC7D1-F120-9444-A8E9-CC8E63B024C0}" type="datetime1">
               <a:rPr lang="en-US" smtClean="0"/>
-              <a:t>4/6/26</a:t>
+              <a:t>4/7/26</a:t>
             </a:fld>
             <a:endParaRPr lang="en-US"/>
           </a:p>
@@ -1058,7 +1058,7 @@
           <a:p>
             <a:fld id="{49D86640-3593-E045-822D-D104552937CC}" type="datetime1">
               <a:rPr lang="en-US" smtClean="0"/>
-              <a:t>4/6/26</a:t>
+              <a:t>4/7/26</a:t>
             </a:fld>
             <a:endParaRPr lang="en-US"/>
           </a:p>
@@ -1243,7 +1243,7 @@
           <a:p>
             <a:fld id="{7F27163F-7EC9-5B47-A192-CB50DE612FED}" type="datetime1">
               <a:rPr lang="en-US" smtClean="0"/>
-              <a:t>4/6/26</a:t>
+              <a:t>4/7/26</a:t>
             </a:fld>
             <a:endParaRPr lang="en-US"/>
           </a:p>
@@ -1505,7 +1505,7 @@
           <a:p>
             <a:fld id="{7734F2BC-3CB7-1146-A19E-4D5E63F3B742}" type="datetime1">
               <a:rPr lang="en-US" smtClean="0"/>
-              <a:t>4/6/26</a:t>
+              <a:t>4/7/26</a:t>
             </a:fld>
             <a:endParaRPr lang="en-US"/>
           </a:p>
@@ -1737,7 +1737,7 @@
           <a:p>
             <a:fld id="{B7F91693-1844-8848-86CC-F923317986AD}" type="datetime1">
               <a:rPr lang="en-US" smtClean="0"/>
-              <a:t>4/6/26</a:t>
+              <a:t>4/7/26</a:t>
             </a:fld>
             <a:endParaRPr lang="en-US"/>
           </a:p>
@@ -2104,7 +2104,7 @@
           <a:p>
             <a:fld id="{42C7BDF2-3CCE-3449-B48D-F4595C3D57FE}" type="datetime1">
               <a:rPr lang="en-US" smtClean="0"/>
-              <a:t>4/6/26</a:t>
+              <a:t>4/7/26</a:t>
             </a:fld>
             <a:endParaRPr lang="en-US"/>
           </a:p>
@@ -2222,7 +2222,7 @@
           <a:p>
             <a:fld id="{9659FDB3-FCD2-A24F-8241-8DA72B16D6B1}" type="datetime1">
               <a:rPr lang="en-US" smtClean="0"/>
-              <a:t>4/6/26</a:t>
+              <a:t>4/7/26</a:t>
             </a:fld>
             <a:endParaRPr lang="en-US"/>
           </a:p>
@@ -2317,7 +2317,7 @@
           <a:p>
             <a:fld id="{006AC91C-CE34-DA4E-B4C2-6B29BDE88023}" type="datetime1">
               <a:rPr lang="en-US" smtClean="0"/>
-              <a:t>4/6/26</a:t>
+              <a:t>4/7/26</a:t>
             </a:fld>
             <a:endParaRPr lang="en-US"/>
           </a:p>
@@ -2594,7 +2594,7 @@
           <a:p>
             <a:fld id="{8DE724E1-3786-E644-95CD-0EC484282321}" type="datetime1">
               <a:rPr lang="en-US" smtClean="0"/>
-              <a:t>4/6/26</a:t>
+              <a:t>4/7/26</a:t>
             </a:fld>
             <a:endParaRPr lang="en-US"/>
           </a:p>
@@ -2851,7 +2851,7 @@
           <a:p>
             <a:fld id="{26DD75EC-C44D-6048-B3A9-C5F04F3202FD}" type="datetime1">
               <a:rPr lang="en-US" smtClean="0"/>
-              <a:t>4/6/26</a:t>
+              <a:t>4/7/26</a:t>
             </a:fld>
             <a:endParaRPr lang="en-US"/>
           </a:p>
@@ -3064,7 +3064,7 @@
           <a:p>
             <a:fld id="{497CE539-832A-BA41-9408-4A63384D7065}" type="datetime1">
               <a:rPr lang="en-US" smtClean="0"/>
-              <a:t>4/6/26</a:t>
+              <a:t>4/7/26</a:t>
             </a:fld>
             <a:endParaRPr lang="en-US"/>
           </a:p>
@@ -3613,292 +3613,6 @@
         <p:cNvPr id="1" name="">
           <a:extLst>
             <a:ext uri="{FF2B5EF4-FFF2-40B4-BE49-F238E27FC236}">
-              <a16:creationId xmlns:a16="http://schemas.microsoft.com/office/drawing/2014/main" id="{1E264BFA-3889-EAB3-E5C6-0D05B1592796}"/>
-            </a:ext>
-          </a:extLst>
-        </p:cNvPr>
-        <p:cNvGrpSpPr/>
-        <p:nvPr/>
-      </p:nvGrpSpPr>
-      <p:grpSpPr>
-        <a:xfrm>
-          <a:off x="0" y="0"/>
-          <a:ext cx="0" cy="0"/>
-          <a:chOff x="0" y="0"/>
-          <a:chExt cx="0" cy="0"/>
-        </a:xfrm>
-      </p:grpSpPr>
-      <p:sp>
-        <p:nvSpPr>
-          <p:cNvPr id="2" name="Title 1">
-            <a:extLst>
-              <a:ext uri="{FF2B5EF4-FFF2-40B4-BE49-F238E27FC236}">
-                <a16:creationId xmlns:a16="http://schemas.microsoft.com/office/drawing/2014/main" id="{9114EC51-C45A-DDBA-20FC-E1CCD69EF1BF}"/>
-              </a:ext>
-            </a:extLst>
-          </p:cNvPr>
-          <p:cNvSpPr>
-            <a:spLocks noGrp="1"/>
-          </p:cNvSpPr>
-          <p:nvPr>
-            <p:ph type="title"/>
-          </p:nvPr>
-        </p:nvSpPr>
-        <p:spPr/>
-        <p:txBody>
-          <a:bodyPr/>
-          <a:lstStyle/>
-          <a:p>
-            <a:r>
-              <a:rPr lang="en-US" b="1" dirty="0">
-                <a:solidFill>
-                  <a:srgbClr val="C00000"/>
-                </a:solidFill>
-              </a:rPr>
-              <a:t>Standards </a:t>
-            </a:r>
-            <a:r>
-              <a:rPr lang="en-US" b="1" baseline="30000" dirty="0">
-                <a:solidFill>
-                  <a:srgbClr val="C00000"/>
-                </a:solidFill>
-              </a:rPr>
-              <a:t>(A Universal Language)</a:t>
-            </a:r>
-          </a:p>
-        </p:txBody>
-      </p:sp>
-      <p:sp>
-        <p:nvSpPr>
-          <p:cNvPr id="3" name="Content Placeholder 2">
-            <a:extLst>
-              <a:ext uri="{FF2B5EF4-FFF2-40B4-BE49-F238E27FC236}">
-                <a16:creationId xmlns:a16="http://schemas.microsoft.com/office/drawing/2014/main" id="{D87230FC-AE5B-4BB8-51CE-7E302E098782}"/>
-              </a:ext>
-            </a:extLst>
-          </p:cNvPr>
-          <p:cNvSpPr>
-            <a:spLocks noGrp="1"/>
-          </p:cNvSpPr>
-          <p:nvPr>
-            <p:ph idx="1"/>
-          </p:nvPr>
-        </p:nvSpPr>
-        <p:spPr>
-          <a:xfrm>
-            <a:off x="628650" y="1319514"/>
-            <a:ext cx="4660980" cy="5173360"/>
-          </a:xfrm>
-        </p:spPr>
-        <p:txBody>
-          <a:bodyPr anchor="ctr">
-            <a:normAutofit/>
-          </a:bodyPr>
-          <a:lstStyle/>
-          <a:p>
-            <a:r>
-              <a:rPr lang="en-US" sz="1800" dirty="0"/>
-              <a:t>Standards are the agreed-upon rules and technical specifications that ensure safety, reliability, and interoperability. Without them, your lightbulb might not fit into a socket made by a different company.</a:t>
-            </a:r>
-          </a:p>
-          <a:p>
-            <a:r>
-              <a:rPr lang="en-US" sz="1800" b="1" dirty="0"/>
-              <a:t>Safety &amp; Compliance</a:t>
-            </a:r>
-            <a:r>
-              <a:rPr lang="en-US" sz="1800" dirty="0"/>
-              <a:t>: Regulatory bodies (like OSHA or the FAA) mandate standards to prevent catastrophic failure and protect the public.</a:t>
-            </a:r>
-          </a:p>
-          <a:p>
-            <a:r>
-              <a:rPr lang="en-US" sz="1800" b="1" dirty="0"/>
-              <a:t>Interchangeability</a:t>
-            </a:r>
-            <a:r>
-              <a:rPr lang="en-US" sz="1800" dirty="0"/>
-              <a:t>: Standards like ISO or ASME ensure that parts from different global suppliers work together seamlessly.</a:t>
-            </a:r>
-          </a:p>
-          <a:p>
-            <a:r>
-              <a:rPr lang="en-US" sz="1800" b="1" dirty="0"/>
-              <a:t>Quality Benchmarks</a:t>
-            </a:r>
-            <a:r>
-              <a:rPr lang="en-US" sz="1800" dirty="0"/>
-              <a:t>: Following established standards provides a baseline for "what good looks like," reducing the risk of design flaws.</a:t>
-            </a:r>
-          </a:p>
-        </p:txBody>
-      </p:sp>
-      <p:sp>
-        <p:nvSpPr>
-          <p:cNvPr id="4" name="Slide Number Placeholder 3">
-            <a:extLst>
-              <a:ext uri="{FF2B5EF4-FFF2-40B4-BE49-F238E27FC236}">
-                <a16:creationId xmlns:a16="http://schemas.microsoft.com/office/drawing/2014/main" id="{8E135D74-250D-4627-CAFE-FE188C245AF5}"/>
-              </a:ext>
-            </a:extLst>
-          </p:cNvPr>
-          <p:cNvSpPr>
-            <a:spLocks noGrp="1"/>
-          </p:cNvSpPr>
-          <p:nvPr>
-            <p:ph type="sldNum" sz="quarter" idx="12"/>
-          </p:nvPr>
-        </p:nvSpPr>
-        <p:spPr/>
-        <p:txBody>
-          <a:bodyPr/>
-          <a:lstStyle/>
-          <a:p>
-            <a:fld id="{727B0ACA-53D9-FB44-A37C-A778C10B232A}" type="slidenum">
-              <a:rPr lang="en-US" smtClean="0"/>
-              <a:t>10</a:t>
-            </a:fld>
-            <a:endParaRPr lang="en-US"/>
-          </a:p>
-        </p:txBody>
-      </p:sp>
-      <p:pic>
-        <p:nvPicPr>
-          <p:cNvPr id="6" name="Picture 5">
-            <a:extLst>
-              <a:ext uri="{FF2B5EF4-FFF2-40B4-BE49-F238E27FC236}">
-                <a16:creationId xmlns:a16="http://schemas.microsoft.com/office/drawing/2014/main" id="{FB3F4C90-689B-BA2E-0544-2E635C386967}"/>
-              </a:ext>
-            </a:extLst>
-          </p:cNvPr>
-          <p:cNvPicPr>
-            <a:picLocks noChangeAspect="1"/>
-          </p:cNvPicPr>
-          <p:nvPr/>
-        </p:nvPicPr>
-        <p:blipFill>
-          <a:blip r:embed="rId2"/>
-          <a:stretch>
-            <a:fillRect/>
-          </a:stretch>
-        </p:blipFill>
-        <p:spPr>
-          <a:xfrm>
-            <a:off x="5289630" y="1319514"/>
-            <a:ext cx="3657600" cy="3307563"/>
-          </a:xfrm>
-          <a:prstGeom prst="rect">
-            <a:avLst/>
-          </a:prstGeom>
-        </p:spPr>
-      </p:pic>
-      <p:sp>
-        <p:nvSpPr>
-          <p:cNvPr id="7" name="TextBox 6">
-            <a:extLst>
-              <a:ext uri="{FF2B5EF4-FFF2-40B4-BE49-F238E27FC236}">
-                <a16:creationId xmlns:a16="http://schemas.microsoft.com/office/drawing/2014/main" id="{8C038E26-178E-44F8-9AAE-BE0E18633A13}"/>
-              </a:ext>
-            </a:extLst>
-          </p:cNvPr>
-          <p:cNvSpPr txBox="1"/>
-          <p:nvPr/>
-        </p:nvSpPr>
-        <p:spPr>
-          <a:xfrm>
-            <a:off x="5289630" y="4627077"/>
-            <a:ext cx="3657600" cy="1569660"/>
-          </a:xfrm>
-          <a:prstGeom prst="rect">
-            <a:avLst/>
-          </a:prstGeom>
-          <a:noFill/>
-        </p:spPr>
-        <p:txBody>
-          <a:bodyPr wrap="square" rtlCol="0">
-            <a:spAutoFit/>
-          </a:bodyPr>
-          <a:lstStyle/>
-          <a:p>
-            <a:r>
-              <a:rPr lang="en-US" sz="1200" dirty="0"/>
-              <a:t>Screw standards define the dimensions, thread pitch, and tolerances for fasteners to ensure interchangeability and strength, with the two primary systems being the Unified Thread Standard (UTS/Imperial) in North America and ISO Metric worldwide. Key standards include ISO 68-1 for metric, and ASME B1.1 for unified inch threads (UNC/UNF).</a:t>
-            </a:r>
-          </a:p>
-        </p:txBody>
-      </p:sp>
-      <p:sp>
-        <p:nvSpPr>
-          <p:cNvPr id="5" name="TextBox 4">
-            <a:extLst>
-              <a:ext uri="{FF2B5EF4-FFF2-40B4-BE49-F238E27FC236}">
-                <a16:creationId xmlns:a16="http://schemas.microsoft.com/office/drawing/2014/main" id="{E866D17D-90CB-D0FC-4AD5-F96AE6BA4F2D}"/>
-              </a:ext>
-            </a:extLst>
-          </p:cNvPr>
-          <p:cNvSpPr txBox="1"/>
-          <p:nvPr/>
-        </p:nvSpPr>
-        <p:spPr>
-          <a:xfrm>
-            <a:off x="2134442" y="183151"/>
-            <a:ext cx="4875117" cy="369332"/>
-          </a:xfrm>
-          <a:prstGeom prst="rect">
-            <a:avLst/>
-          </a:prstGeom>
-          <a:noFill/>
-        </p:spPr>
-        <p:txBody>
-          <a:bodyPr wrap="none" rtlCol="0">
-            <a:spAutoFit/>
-          </a:bodyPr>
-          <a:lstStyle/>
-          <a:p>
-            <a:pPr algn="ctr"/>
-            <a:r>
-              <a:rPr lang="en-US" b="1" dirty="0">
-                <a:solidFill>
-                  <a:srgbClr val="00B0F0"/>
-                </a:solidFill>
-                <a:highlight>
-                  <a:srgbClr val="FFFF00"/>
-                </a:highlight>
-              </a:rPr>
-              <a:t>IT NEEDS TO BE REVIEWED IN ALL PROJECTS!</a:t>
-            </a:r>
-          </a:p>
-        </p:txBody>
-      </p:sp>
-    </p:spTree>
-    <p:extLst>
-      <p:ext uri="{BB962C8B-B14F-4D97-AF65-F5344CB8AC3E}">
-        <p14:creationId xmlns:p14="http://schemas.microsoft.com/office/powerpoint/2010/main" val="4104882973"/>
-      </p:ext>
-    </p:extLst>
-  </p:cSld>
-  <p:clrMapOvr>
-    <a:masterClrMapping/>
-  </p:clrMapOvr>
-</p:sld>
-</file>
-
-<file path=ppt/slides/slide11.xml><?xml version="1.0" encoding="utf-8"?>
-<p:sld xmlns:a="http://schemas.openxmlformats.org/drawingml/2006/main" xmlns:r="http://schemas.openxmlformats.org/officeDocument/2006/relationships" xmlns:p="http://schemas.openxmlformats.org/presentationml/2006/main">
-  <p:cSld>
-    <p:bg>
-      <p:bgPr>
-        <a:solidFill>
-          <a:schemeClr val="bg2"/>
-        </a:solidFill>
-        <a:effectLst/>
-      </p:bgPr>
-    </p:bg>
-    <p:spTree>
-      <p:nvGrpSpPr>
-        <p:cNvPr id="1" name="">
-          <a:extLst>
-            <a:ext uri="{FF2B5EF4-FFF2-40B4-BE49-F238E27FC236}">
               <a16:creationId xmlns:a16="http://schemas.microsoft.com/office/drawing/2014/main" id="{529578D0-5979-248B-10E9-B2C31739093F}"/>
             </a:ext>
           </a:extLst>
@@ -4175,7 +3889,7 @@
           <a:p>
             <a:fld id="{727B0ACA-53D9-FB44-A37C-A778C10B232A}" type="slidenum">
               <a:rPr lang="en-US" smtClean="0"/>
-              <a:t>11</a:t>
+              <a:t>10</a:t>
             </a:fld>
             <a:endParaRPr lang="en-US"/>
           </a:p>
@@ -4194,7 +3908,7 @@
 </p:sld>
 </file>
 
-<file path=ppt/slides/slide12.xml><?xml version="1.0" encoding="utf-8"?>
+<file path=ppt/slides/slide11.xml><?xml version="1.0" encoding="utf-8"?>
 <p:sld xmlns:a="http://schemas.openxmlformats.org/drawingml/2006/main" xmlns:r="http://schemas.openxmlformats.org/officeDocument/2006/relationships" xmlns:p="http://schemas.openxmlformats.org/presentationml/2006/main">
   <p:cSld>
     <p:bg>
@@ -4392,7 +4106,7 @@
           <a:p>
             <a:fld id="{727B0ACA-53D9-FB44-A37C-A778C10B232A}" type="slidenum">
               <a:rPr lang="en-US" smtClean="0"/>
-              <a:t>12</a:t>
+              <a:t>11</a:t>
             </a:fld>
             <a:endParaRPr lang="en-US"/>
           </a:p>
@@ -4411,7 +4125,255 @@
 </p:sld>
 </file>
 
+<file path=ppt/slides/slide12.xml><?xml version="1.0" encoding="utf-8"?>
+<p:sld xmlns:a="http://schemas.openxmlformats.org/drawingml/2006/main" xmlns:r="http://schemas.openxmlformats.org/officeDocument/2006/relationships" xmlns:p="http://schemas.openxmlformats.org/presentationml/2006/main">
+  <p:cSld>
+    <p:bg>
+      <p:bgPr>
+        <a:solidFill>
+          <a:schemeClr val="accent6">
+            <a:lumMod val="40000"/>
+            <a:lumOff val="60000"/>
+          </a:schemeClr>
+        </a:solidFill>
+        <a:effectLst/>
+      </p:bgPr>
+    </p:bg>
+    <p:spTree>
+      <p:nvGrpSpPr>
+        <p:cNvPr id="1" name="">
+          <a:extLst>
+            <a:ext uri="{FF2B5EF4-FFF2-40B4-BE49-F238E27FC236}">
+              <a16:creationId xmlns:a16="http://schemas.microsoft.com/office/drawing/2014/main" id="{EC1A15D5-204B-CDC8-CD0B-5A7A1F98771F}"/>
+            </a:ext>
+          </a:extLst>
+        </p:cNvPr>
+        <p:cNvGrpSpPr/>
+        <p:nvPr/>
+      </p:nvGrpSpPr>
+      <p:grpSpPr>
+        <a:xfrm>
+          <a:off x="0" y="0"/>
+          <a:ext cx="0" cy="0"/>
+          <a:chOff x="0" y="0"/>
+          <a:chExt cx="0" cy="0"/>
+        </a:xfrm>
+      </p:grpSpPr>
+      <p:sp>
+        <p:nvSpPr>
+          <p:cNvPr id="2" name="Title 1">
+            <a:extLst>
+              <a:ext uri="{FF2B5EF4-FFF2-40B4-BE49-F238E27FC236}">
+                <a16:creationId xmlns:a16="http://schemas.microsoft.com/office/drawing/2014/main" id="{5B3B5266-C482-2BE1-0271-68A87CD63769}"/>
+              </a:ext>
+            </a:extLst>
+          </p:cNvPr>
+          <p:cNvSpPr>
+            <a:spLocks noGrp="1"/>
+          </p:cNvSpPr>
+          <p:nvPr>
+            <p:ph type="title"/>
+          </p:nvPr>
+        </p:nvSpPr>
+        <p:spPr/>
+        <p:txBody>
+          <a:bodyPr/>
+          <a:lstStyle/>
+          <a:p>
+            <a:r>
+              <a:rPr lang="en-US" b="1" dirty="0">
+                <a:solidFill>
+                  <a:srgbClr val="7030A0"/>
+                </a:solidFill>
+              </a:rPr>
+              <a:t>Comms Activity</a:t>
+            </a:r>
+          </a:p>
+        </p:txBody>
+      </p:sp>
+      <p:sp>
+        <p:nvSpPr>
+          <p:cNvPr id="4" name="Slide Number Placeholder 3">
+            <a:extLst>
+              <a:ext uri="{FF2B5EF4-FFF2-40B4-BE49-F238E27FC236}">
+                <a16:creationId xmlns:a16="http://schemas.microsoft.com/office/drawing/2014/main" id="{59BCF317-B36D-4A37-5EC1-D93FFC147ACC}"/>
+              </a:ext>
+            </a:extLst>
+          </p:cNvPr>
+          <p:cNvSpPr>
+            <a:spLocks noGrp="1"/>
+          </p:cNvSpPr>
+          <p:nvPr>
+            <p:ph type="sldNum" sz="quarter" idx="12"/>
+          </p:nvPr>
+        </p:nvSpPr>
+        <p:spPr/>
+        <p:txBody>
+          <a:bodyPr/>
+          <a:lstStyle/>
+          <a:p>
+            <a:fld id="{727B0ACA-53D9-FB44-A37C-A778C10B232A}" type="slidenum">
+              <a:rPr lang="en-US" smtClean="0"/>
+              <a:t>12</a:t>
+            </a:fld>
+            <a:endParaRPr lang="en-US"/>
+          </a:p>
+        </p:txBody>
+      </p:sp>
+    </p:spTree>
+    <p:extLst>
+      <p:ext uri="{BB962C8B-B14F-4D97-AF65-F5344CB8AC3E}">
+        <p14:creationId xmlns:p14="http://schemas.microsoft.com/office/powerpoint/2010/main" val="3702063022"/>
+      </p:ext>
+    </p:extLst>
+  </p:cSld>
+  <p:clrMapOvr>
+    <a:masterClrMapping/>
+  </p:clrMapOvr>
+</p:sld>
+</file>
+
 <file path=ppt/slides/slide13.xml><?xml version="1.0" encoding="utf-8"?>
+<p:sld xmlns:a="http://schemas.openxmlformats.org/drawingml/2006/main" xmlns:r="http://schemas.openxmlformats.org/officeDocument/2006/relationships" xmlns:p="http://schemas.openxmlformats.org/presentationml/2006/main">
+  <p:cSld>
+    <p:spTree>
+      <p:nvGrpSpPr>
+        <p:cNvPr id="1" name="">
+          <a:extLst>
+            <a:ext uri="{FF2B5EF4-FFF2-40B4-BE49-F238E27FC236}">
+              <a16:creationId xmlns:a16="http://schemas.microsoft.com/office/drawing/2014/main" id="{FC12A9A2-3256-2E79-A75E-1BE32C5B346C}"/>
+            </a:ext>
+          </a:extLst>
+        </p:cNvPr>
+        <p:cNvGrpSpPr/>
+        <p:nvPr/>
+      </p:nvGrpSpPr>
+      <p:grpSpPr>
+        <a:xfrm>
+          <a:off x="0" y="0"/>
+          <a:ext cx="0" cy="0"/>
+          <a:chOff x="0" y="0"/>
+          <a:chExt cx="0" cy="0"/>
+        </a:xfrm>
+      </p:grpSpPr>
+      <p:sp>
+        <p:nvSpPr>
+          <p:cNvPr id="2" name="Title 1">
+            <a:extLst>
+              <a:ext uri="{FF2B5EF4-FFF2-40B4-BE49-F238E27FC236}">
+                <a16:creationId xmlns:a16="http://schemas.microsoft.com/office/drawing/2014/main" id="{B8AE2DEC-377B-0E82-8C87-7D7E578FC63E}"/>
+              </a:ext>
+            </a:extLst>
+          </p:cNvPr>
+          <p:cNvSpPr>
+            <a:spLocks noGrp="1"/>
+          </p:cNvSpPr>
+          <p:nvPr>
+            <p:ph type="title"/>
+          </p:nvPr>
+        </p:nvSpPr>
+        <p:spPr/>
+        <p:txBody>
+          <a:bodyPr/>
+          <a:lstStyle/>
+          <a:p>
+            <a:r>
+              <a:rPr lang="en-US" b="1" dirty="0">
+                <a:solidFill>
+                  <a:srgbClr val="7030A0"/>
+                </a:solidFill>
+              </a:rPr>
+              <a:t>Phase 4 / </a:t>
+            </a:r>
+            <a:br>
+              <a:rPr lang="en-US" b="1" dirty="0">
+                <a:solidFill>
+                  <a:srgbClr val="7030A0"/>
+                </a:solidFill>
+              </a:rPr>
+            </a:br>
+            <a:r>
+              <a:rPr lang="en-US" b="1" dirty="0">
+                <a:solidFill>
+                  <a:srgbClr val="7030A0"/>
+                </a:solidFill>
+              </a:rPr>
+              <a:t>Phase 4 Guidelines</a:t>
+            </a:r>
+          </a:p>
+        </p:txBody>
+      </p:sp>
+      <p:sp>
+        <p:nvSpPr>
+          <p:cNvPr id="3" name="Text Placeholder 2">
+            <a:extLst>
+              <a:ext uri="{FF2B5EF4-FFF2-40B4-BE49-F238E27FC236}">
+                <a16:creationId xmlns:a16="http://schemas.microsoft.com/office/drawing/2014/main" id="{C99DBCCB-5A0C-0E00-0F62-99C12B2EBF68}"/>
+              </a:ext>
+            </a:extLst>
+          </p:cNvPr>
+          <p:cNvSpPr>
+            <a:spLocks noGrp="1"/>
+          </p:cNvSpPr>
+          <p:nvPr>
+            <p:ph type="body" idx="1"/>
+          </p:nvPr>
+        </p:nvSpPr>
+        <p:spPr/>
+        <p:txBody>
+          <a:bodyPr/>
+          <a:lstStyle/>
+          <a:p>
+            <a:r>
+              <a:rPr lang="en-US" dirty="0"/>
+              <a:t>On Canvas</a:t>
+            </a:r>
+          </a:p>
+        </p:txBody>
+      </p:sp>
+      <p:sp>
+        <p:nvSpPr>
+          <p:cNvPr id="4" name="Slide Number Placeholder 3">
+            <a:extLst>
+              <a:ext uri="{FF2B5EF4-FFF2-40B4-BE49-F238E27FC236}">
+                <a16:creationId xmlns:a16="http://schemas.microsoft.com/office/drawing/2014/main" id="{8D361403-C602-F90D-10BE-ACCE376F8DB2}"/>
+              </a:ext>
+            </a:extLst>
+          </p:cNvPr>
+          <p:cNvSpPr>
+            <a:spLocks noGrp="1"/>
+          </p:cNvSpPr>
+          <p:nvPr>
+            <p:ph type="sldNum" sz="quarter" idx="12"/>
+          </p:nvPr>
+        </p:nvSpPr>
+        <p:spPr/>
+        <p:txBody>
+          <a:bodyPr/>
+          <a:lstStyle/>
+          <a:p>
+            <a:fld id="{727B0ACA-53D9-FB44-A37C-A778C10B232A}" type="slidenum">
+              <a:rPr lang="en-US" smtClean="0"/>
+              <a:t>13</a:t>
+            </a:fld>
+            <a:endParaRPr lang="en-US"/>
+          </a:p>
+        </p:txBody>
+      </p:sp>
+    </p:spTree>
+    <p:extLst>
+      <p:ext uri="{BB962C8B-B14F-4D97-AF65-F5344CB8AC3E}">
+        <p14:creationId xmlns:p14="http://schemas.microsoft.com/office/powerpoint/2010/main" val="547044874"/>
+      </p:ext>
+    </p:extLst>
+  </p:cSld>
+  <p:clrMapOvr>
+    <a:masterClrMapping/>
+  </p:clrMapOvr>
+</p:sld>
+</file>
+
+<file path=ppt/slides/slide14.xml><?xml version="1.0" encoding="utf-8"?>
 <p:sld xmlns:a="http://schemas.openxmlformats.org/drawingml/2006/main" xmlns:r="http://schemas.openxmlformats.org/officeDocument/2006/relationships" xmlns:p="http://schemas.openxmlformats.org/presentationml/2006/main">
   <p:cSld>
     <p:spTree>
@@ -4600,7 +4562,7 @@
           <a:p>
             <a:fld id="{727B0ACA-53D9-FB44-A37C-A778C10B232A}" type="slidenum">
               <a:rPr lang="en-US" smtClean="0"/>
-              <a:t>13</a:t>
+              <a:t>14</a:t>
             </a:fld>
             <a:endParaRPr lang="en-US"/>
           </a:p>
@@ -4610,131 +4572,6 @@
     <p:extLst>
       <p:ext uri="{BB962C8B-B14F-4D97-AF65-F5344CB8AC3E}">
         <p14:creationId xmlns:p14="http://schemas.microsoft.com/office/powerpoint/2010/main" val="745694094"/>
-      </p:ext>
-    </p:extLst>
-  </p:cSld>
-  <p:clrMapOvr>
-    <a:masterClrMapping/>
-  </p:clrMapOvr>
-</p:sld>
-</file>
-
-<file path=ppt/slides/slide14.xml><?xml version="1.0" encoding="utf-8"?>
-<p:sld xmlns:a="http://schemas.openxmlformats.org/drawingml/2006/main" xmlns:r="http://schemas.openxmlformats.org/officeDocument/2006/relationships" xmlns:p="http://schemas.openxmlformats.org/presentationml/2006/main">
-  <p:cSld>
-    <p:spTree>
-      <p:nvGrpSpPr>
-        <p:cNvPr id="1" name="">
-          <a:extLst>
-            <a:ext uri="{FF2B5EF4-FFF2-40B4-BE49-F238E27FC236}">
-              <a16:creationId xmlns:a16="http://schemas.microsoft.com/office/drawing/2014/main" id="{FC12A9A2-3256-2E79-A75E-1BE32C5B346C}"/>
-            </a:ext>
-          </a:extLst>
-        </p:cNvPr>
-        <p:cNvGrpSpPr/>
-        <p:nvPr/>
-      </p:nvGrpSpPr>
-      <p:grpSpPr>
-        <a:xfrm>
-          <a:off x="0" y="0"/>
-          <a:ext cx="0" cy="0"/>
-          <a:chOff x="0" y="0"/>
-          <a:chExt cx="0" cy="0"/>
-        </a:xfrm>
-      </p:grpSpPr>
-      <p:sp>
-        <p:nvSpPr>
-          <p:cNvPr id="2" name="Title 1">
-            <a:extLst>
-              <a:ext uri="{FF2B5EF4-FFF2-40B4-BE49-F238E27FC236}">
-                <a16:creationId xmlns:a16="http://schemas.microsoft.com/office/drawing/2014/main" id="{B8AE2DEC-377B-0E82-8C87-7D7E578FC63E}"/>
-              </a:ext>
-            </a:extLst>
-          </p:cNvPr>
-          <p:cNvSpPr>
-            <a:spLocks noGrp="1"/>
-          </p:cNvSpPr>
-          <p:nvPr>
-            <p:ph type="title"/>
-          </p:nvPr>
-        </p:nvSpPr>
-        <p:spPr/>
-        <p:txBody>
-          <a:bodyPr/>
-          <a:lstStyle/>
-          <a:p>
-            <a:r>
-              <a:rPr lang="en-US" b="1" dirty="0">
-                <a:solidFill>
-                  <a:srgbClr val="7030A0"/>
-                </a:solidFill>
-              </a:rPr>
-              <a:t>Phase 4 Guidelines</a:t>
-            </a:r>
-          </a:p>
-        </p:txBody>
-      </p:sp>
-      <p:sp>
-        <p:nvSpPr>
-          <p:cNvPr id="3" name="Text Placeholder 2">
-            <a:extLst>
-              <a:ext uri="{FF2B5EF4-FFF2-40B4-BE49-F238E27FC236}">
-                <a16:creationId xmlns:a16="http://schemas.microsoft.com/office/drawing/2014/main" id="{C99DBCCB-5A0C-0E00-0F62-99C12B2EBF68}"/>
-              </a:ext>
-            </a:extLst>
-          </p:cNvPr>
-          <p:cNvSpPr>
-            <a:spLocks noGrp="1"/>
-          </p:cNvSpPr>
-          <p:nvPr>
-            <p:ph type="body" idx="1"/>
-          </p:nvPr>
-        </p:nvSpPr>
-        <p:spPr/>
-        <p:txBody>
-          <a:bodyPr/>
-          <a:lstStyle/>
-          <a:p>
-            <a:r>
-              <a:rPr lang="en-US" dirty="0"/>
-              <a:t>On Canvas</a:t>
-            </a:r>
-          </a:p>
-        </p:txBody>
-      </p:sp>
-      <p:sp>
-        <p:nvSpPr>
-          <p:cNvPr id="4" name="Slide Number Placeholder 3">
-            <a:extLst>
-              <a:ext uri="{FF2B5EF4-FFF2-40B4-BE49-F238E27FC236}">
-                <a16:creationId xmlns:a16="http://schemas.microsoft.com/office/drawing/2014/main" id="{8D361403-C602-F90D-10BE-ACCE376F8DB2}"/>
-              </a:ext>
-            </a:extLst>
-          </p:cNvPr>
-          <p:cNvSpPr>
-            <a:spLocks noGrp="1"/>
-          </p:cNvSpPr>
-          <p:nvPr>
-            <p:ph type="sldNum" sz="quarter" idx="12"/>
-          </p:nvPr>
-        </p:nvSpPr>
-        <p:spPr/>
-        <p:txBody>
-          <a:bodyPr/>
-          <a:lstStyle/>
-          <a:p>
-            <a:fld id="{727B0ACA-53D9-FB44-A37C-A778C10B232A}" type="slidenum">
-              <a:rPr lang="en-US" smtClean="0"/>
-              <a:t>14</a:t>
-            </a:fld>
-            <a:endParaRPr lang="en-US"/>
-          </a:p>
-        </p:txBody>
-      </p:sp>
-    </p:spTree>
-    <p:extLst>
-      <p:ext uri="{BB962C8B-B14F-4D97-AF65-F5344CB8AC3E}">
-        <p14:creationId xmlns:p14="http://schemas.microsoft.com/office/powerpoint/2010/main" val="547044874"/>
       </p:ext>
     </p:extLst>
   </p:cSld>
@@ -6586,7 +6423,26 @@
                   <a:srgbClr val="002060"/>
                 </a:solidFill>
               </a:rPr>
-              <a:t>(everyone needs to be here next week!)</a:t>
+              <a:t>(</a:t>
+            </a:r>
+            <a:r>
+              <a:rPr lang="en-US" b="1" baseline="30000" dirty="0">
+                <a:solidFill>
+                  <a:srgbClr val="002060"/>
+                </a:solidFill>
+                <a:highlight>
+                  <a:srgbClr val="FFFF00"/>
+                </a:highlight>
+              </a:rPr>
+              <a:t>everyone needs to be here next week!</a:t>
+            </a:r>
+            <a:r>
+              <a:rPr lang="en-US" b="1" baseline="30000" dirty="0">
+                <a:solidFill>
+                  <a:srgbClr val="002060"/>
+                </a:solidFill>
+              </a:rPr>
+              <a:t>)</a:t>
             </a:r>
             <a:br>
               <a:rPr lang="en-US" b="1" dirty="0">
@@ -6596,7 +6452,7 @@
               </a:rPr>
             </a:br>
             <a:r>
-              <a:rPr lang="en-US" sz="1900" dirty="0">
+              <a:rPr lang="en-US" sz="1800" dirty="0">
                 <a:solidFill>
                   <a:srgbClr val="002060"/>
                 </a:solidFill>
@@ -6619,7 +6475,33 @@
           <a:p>
             <a:pPr lvl="1"/>
             <a:r>
-              <a:rPr lang="en-US" dirty="0">
+              <a:rPr lang="en-US" sz="1800" dirty="0">
+                <a:solidFill>
+                  <a:schemeClr val="accent6">
+                    <a:lumMod val="75000"/>
+                  </a:schemeClr>
+                </a:solidFill>
+              </a:rPr>
+              <a:t>Ethics</a:t>
+            </a:r>
+          </a:p>
+          <a:p>
+            <a:pPr lvl="1"/>
+            <a:r>
+              <a:rPr lang="en-US" sz="1800" dirty="0">
+                <a:solidFill>
+                  <a:schemeClr val="accent6">
+                    <a:lumMod val="75000"/>
+                  </a:schemeClr>
+                </a:solidFill>
+              </a:rPr>
+              <a:t>Elevator Pitch</a:t>
+            </a:r>
+          </a:p>
+          <a:p>
+            <a:pPr lvl="1"/>
+            <a:r>
+              <a:rPr lang="en-US" sz="1800" dirty="0">
                 <a:solidFill>
                   <a:schemeClr val="accent6">
                     <a:lumMod val="75000"/>
@@ -6630,19 +6512,6 @@
             </a:r>
           </a:p>
           <a:p>
-            <a:pPr lvl="1"/>
-            <a:r>
-              <a:rPr lang="en-US" dirty="0">
-                <a:solidFill>
-                  <a:schemeClr val="accent6">
-                    <a:lumMod val="75000"/>
-                  </a:schemeClr>
-                </a:solidFill>
-              </a:rPr>
-              <a:t>Ethics</a:t>
-            </a:r>
-          </a:p>
-          <a:p>
             <a:r>
               <a:rPr lang="en-US" b="1" dirty="0">
                 <a:solidFill>
@@ -6655,7 +6524,7 @@
           <a:p>
             <a:pPr lvl="1"/>
             <a:r>
-              <a:rPr lang="en-US" dirty="0">
+              <a:rPr lang="en-US" sz="1800" dirty="0">
                 <a:solidFill>
                   <a:srgbClr val="FFAC00"/>
                 </a:solidFill>
@@ -6666,7 +6535,7 @@
           <a:p>
             <a:pPr lvl="2"/>
             <a:r>
-              <a:rPr lang="en-US" b="1" dirty="0">
+              <a:rPr lang="en-US" sz="1800" b="1" dirty="0">
                 <a:solidFill>
                   <a:srgbClr val="FFAC00"/>
                 </a:solidFill>
@@ -6677,7 +6546,7 @@
           <a:p>
             <a:pPr lvl="2"/>
             <a:r>
-              <a:rPr lang="en-US" b="1" dirty="0">
+              <a:rPr lang="en-US" sz="1800" b="1" dirty="0">
                 <a:solidFill>
                   <a:schemeClr val="accent2">
                     <a:lumMod val="75000"/>
@@ -6735,6 +6604,744 @@
 </file>
 
 <file path=ppt/slides/slide4.xml><?xml version="1.0" encoding="utf-8"?>
+<p:sld xmlns:a="http://schemas.openxmlformats.org/drawingml/2006/main" xmlns:r="http://schemas.openxmlformats.org/officeDocument/2006/relationships" xmlns:p="http://schemas.openxmlformats.org/presentationml/2006/main">
+  <p:cSld>
+    <p:spTree>
+      <p:nvGrpSpPr>
+        <p:cNvPr id="1" name=""/>
+        <p:cNvGrpSpPr/>
+        <p:nvPr/>
+      </p:nvGrpSpPr>
+      <p:grpSpPr>
+        <a:xfrm>
+          <a:off x="0" y="0"/>
+          <a:ext cx="0" cy="0"/>
+          <a:chOff x="0" y="0"/>
+          <a:chExt cx="0" cy="0"/>
+        </a:xfrm>
+      </p:grpSpPr>
+      <p:sp>
+        <p:nvSpPr>
+          <p:cNvPr id="5" name="Title 4">
+            <a:extLst>
+              <a:ext uri="{FF2B5EF4-FFF2-40B4-BE49-F238E27FC236}">
+                <a16:creationId xmlns:a16="http://schemas.microsoft.com/office/drawing/2014/main" id="{68BE5633-9F5C-F7CE-0B3B-76A5E3D0E5EF}"/>
+              </a:ext>
+            </a:extLst>
+          </p:cNvPr>
+          <p:cNvSpPr>
+            <a:spLocks noGrp="1"/>
+          </p:cNvSpPr>
+          <p:nvPr>
+            <p:ph type="title"/>
+          </p:nvPr>
+        </p:nvSpPr>
+        <p:spPr/>
+        <p:txBody>
+          <a:bodyPr/>
+          <a:lstStyle/>
+          <a:p>
+            <a:r>
+              <a:rPr lang="en-US" b="1" dirty="0">
+                <a:solidFill>
+                  <a:srgbClr val="C00000"/>
+                </a:solidFill>
+              </a:rPr>
+              <a:t>Upcoming Semester Schedule</a:t>
+            </a:r>
+          </a:p>
+        </p:txBody>
+      </p:sp>
+      <p:sp>
+        <p:nvSpPr>
+          <p:cNvPr id="6" name="Content Placeholder 5">
+            <a:extLst>
+              <a:ext uri="{FF2B5EF4-FFF2-40B4-BE49-F238E27FC236}">
+                <a16:creationId xmlns:a16="http://schemas.microsoft.com/office/drawing/2014/main" id="{DC56BA54-B0C5-3CDD-E853-8A76DC39F15C}"/>
+              </a:ext>
+            </a:extLst>
+          </p:cNvPr>
+          <p:cNvSpPr>
+            <a:spLocks noGrp="1"/>
+          </p:cNvSpPr>
+          <p:nvPr>
+            <p:ph idx="1"/>
+          </p:nvPr>
+        </p:nvSpPr>
+        <p:spPr>
+          <a:xfrm>
+            <a:off x="628650" y="1690689"/>
+            <a:ext cx="7886700" cy="4486274"/>
+          </a:xfrm>
+        </p:spPr>
+        <p:txBody>
+          <a:bodyPr>
+            <a:normAutofit/>
+          </a:bodyPr>
+          <a:lstStyle/>
+          <a:p>
+            <a:r>
+              <a:rPr lang="en-US" sz="2200" dirty="0"/>
+              <a:t>4/14 </a:t>
+            </a:r>
+            <a:r>
+              <a:rPr lang="en-US" sz="2200" b="1" dirty="0"/>
+              <a:t>Phase 4 Presentations BH/COE</a:t>
+            </a:r>
+          </a:p>
+          <a:p>
+            <a:r>
+              <a:rPr lang="en-US" sz="2200" dirty="0"/>
+              <a:t>4/14 </a:t>
+            </a:r>
+            <a:r>
+              <a:rPr lang="en-US" sz="2200" baseline="30000" dirty="0"/>
+              <a:t>mandatory attendance for all 2:15-3:15</a:t>
+            </a:r>
+            <a:r>
+              <a:rPr lang="en-US" sz="2200" dirty="0"/>
+              <a:t> </a:t>
+            </a:r>
+            <a:r>
+              <a:rPr lang="en-US" sz="2200" b="1" dirty="0"/>
+              <a:t>Senior Exit Interviews</a:t>
+            </a:r>
+          </a:p>
+          <a:p>
+            <a:r>
+              <a:rPr lang="en-US" sz="2200" dirty="0"/>
+              <a:t>4/21 </a:t>
+            </a:r>
+            <a:r>
+              <a:rPr lang="en-US" sz="2200" b="1" dirty="0"/>
+              <a:t>Phase 4 Presentations ML</a:t>
+            </a:r>
+          </a:p>
+          <a:p>
+            <a:r>
+              <a:rPr lang="en-US" sz="2200" dirty="0"/>
+              <a:t>4/24 </a:t>
+            </a:r>
+            <a:r>
+              <a:rPr lang="en-US" sz="2200" baseline="30000" dirty="0"/>
+              <a:t>in-person, all day</a:t>
+            </a:r>
+            <a:r>
+              <a:rPr lang="en-US" sz="2200" dirty="0"/>
+              <a:t> </a:t>
+            </a:r>
+            <a:r>
+              <a:rPr lang="en-US" sz="2200" b="1" dirty="0"/>
+              <a:t>COE Showcase</a:t>
+            </a:r>
+            <a:br>
+              <a:rPr lang="en-US" sz="2200" dirty="0"/>
+            </a:br>
+            <a:r>
+              <a:rPr lang="en-US" sz="1800" dirty="0"/>
+              <a:t>schedule at </a:t>
+            </a:r>
+            <a:r>
+              <a:rPr lang="en-US" sz="1800" dirty="0">
+                <a:hlinkClick r:id="rId2"/>
+              </a:rPr>
+              <a:t>https://tamueps.secure-platform.com/</a:t>
+            </a:r>
+            <a:br>
+              <a:rPr lang="en-US" sz="1800" dirty="0"/>
+            </a:br>
+            <a:br>
+              <a:rPr lang="en-US" sz="1800" dirty="0"/>
+            </a:br>
+            <a:br>
+              <a:rPr lang="en-US" sz="1800" dirty="0"/>
+            </a:br>
+            <a:br>
+              <a:rPr lang="en-US" sz="1800" dirty="0"/>
+            </a:br>
+            <a:endParaRPr lang="en-US" sz="1800" dirty="0"/>
+          </a:p>
+          <a:p>
+            <a:r>
+              <a:rPr lang="en-US" sz="2200" dirty="0"/>
+              <a:t>5/5</a:t>
+            </a:r>
+            <a:r>
+              <a:rPr lang="en-US" sz="2200" baseline="30000" dirty="0"/>
+              <a:t>5 PM</a:t>
+            </a:r>
+            <a:r>
+              <a:rPr lang="en-US" sz="2200" dirty="0"/>
+              <a:t> </a:t>
+            </a:r>
+            <a:r>
+              <a:rPr lang="en-US" sz="2200" b="1" dirty="0"/>
+              <a:t>Final Report Due</a:t>
+            </a:r>
+          </a:p>
+        </p:txBody>
+      </p:sp>
+      <p:sp>
+        <p:nvSpPr>
+          <p:cNvPr id="4" name="Slide Number Placeholder 3">
+            <a:extLst>
+              <a:ext uri="{FF2B5EF4-FFF2-40B4-BE49-F238E27FC236}">
+                <a16:creationId xmlns:a16="http://schemas.microsoft.com/office/drawing/2014/main" id="{BF926C73-35A2-D42C-CDED-8F3C0FD932A2}"/>
+              </a:ext>
+            </a:extLst>
+          </p:cNvPr>
+          <p:cNvSpPr>
+            <a:spLocks noGrp="1"/>
+          </p:cNvSpPr>
+          <p:nvPr>
+            <p:ph type="sldNum" sz="quarter" idx="12"/>
+          </p:nvPr>
+        </p:nvSpPr>
+        <p:spPr/>
+        <p:txBody>
+          <a:bodyPr/>
+          <a:lstStyle/>
+          <a:p>
+            <a:fld id="{727B0ACA-53D9-FB44-A37C-A778C10B232A}" type="slidenum">
+              <a:rPr lang="en-US" smtClean="0"/>
+              <a:t>4</a:t>
+            </a:fld>
+            <a:endParaRPr lang="en-US"/>
+          </a:p>
+        </p:txBody>
+      </p:sp>
+      <p:pic>
+        <p:nvPicPr>
+          <p:cNvPr id="3" name="Picture 2">
+            <a:extLst>
+              <a:ext uri="{FF2B5EF4-FFF2-40B4-BE49-F238E27FC236}">
+                <a16:creationId xmlns:a16="http://schemas.microsoft.com/office/drawing/2014/main" id="{2FBC0925-F4B1-167B-7064-075541813205}"/>
+              </a:ext>
+            </a:extLst>
+          </p:cNvPr>
+          <p:cNvPicPr>
+            <a:picLocks noChangeAspect="1"/>
+          </p:cNvPicPr>
+          <p:nvPr/>
+        </p:nvPicPr>
+        <p:blipFill>
+          <a:blip r:embed="rId3"/>
+          <a:stretch>
+            <a:fillRect/>
+          </a:stretch>
+        </p:blipFill>
+        <p:spPr>
+          <a:xfrm>
+            <a:off x="924674" y="3601680"/>
+            <a:ext cx="6858000" cy="912227"/>
+          </a:xfrm>
+          <a:prstGeom prst="rect">
+            <a:avLst/>
+          </a:prstGeom>
+        </p:spPr>
+      </p:pic>
+    </p:spTree>
+    <p:extLst>
+      <p:ext uri="{BB962C8B-B14F-4D97-AF65-F5344CB8AC3E}">
+        <p14:creationId xmlns:p14="http://schemas.microsoft.com/office/powerpoint/2010/main" val="1461869108"/>
+      </p:ext>
+    </p:extLst>
+  </p:cSld>
+  <p:clrMapOvr>
+    <a:masterClrMapping/>
+  </p:clrMapOvr>
+</p:sld>
+</file>
+
+<file path=ppt/slides/slide5.xml><?xml version="1.0" encoding="utf-8"?>
+<p:sld xmlns:a="http://schemas.openxmlformats.org/drawingml/2006/main" xmlns:r="http://schemas.openxmlformats.org/officeDocument/2006/relationships" xmlns:p="http://schemas.openxmlformats.org/presentationml/2006/main">
+  <p:cSld>
+    <p:spTree>
+      <p:nvGrpSpPr>
+        <p:cNvPr id="1" name="">
+          <a:extLst>
+            <a:ext uri="{FF2B5EF4-FFF2-40B4-BE49-F238E27FC236}">
+              <a16:creationId xmlns:a16="http://schemas.microsoft.com/office/drawing/2014/main" id="{50671C1E-5C8D-2CE2-32D1-91AB9A21D834}"/>
+            </a:ext>
+          </a:extLst>
+        </p:cNvPr>
+        <p:cNvGrpSpPr/>
+        <p:nvPr/>
+      </p:nvGrpSpPr>
+      <p:grpSpPr>
+        <a:xfrm>
+          <a:off x="0" y="0"/>
+          <a:ext cx="0" cy="0"/>
+          <a:chOff x="0" y="0"/>
+          <a:chExt cx="0" cy="0"/>
+        </a:xfrm>
+      </p:grpSpPr>
+      <p:sp>
+        <p:nvSpPr>
+          <p:cNvPr id="5" name="Title 4">
+            <a:extLst>
+              <a:ext uri="{FF2B5EF4-FFF2-40B4-BE49-F238E27FC236}">
+                <a16:creationId xmlns:a16="http://schemas.microsoft.com/office/drawing/2014/main" id="{94864BC1-6CBF-7040-D785-377308C6A781}"/>
+              </a:ext>
+            </a:extLst>
+          </p:cNvPr>
+          <p:cNvSpPr>
+            <a:spLocks noGrp="1"/>
+          </p:cNvSpPr>
+          <p:nvPr>
+            <p:ph type="title"/>
+          </p:nvPr>
+        </p:nvSpPr>
+        <p:spPr/>
+        <p:txBody>
+          <a:bodyPr/>
+          <a:lstStyle/>
+          <a:p>
+            <a:r>
+              <a:rPr lang="en-US" b="1" dirty="0">
+                <a:solidFill>
+                  <a:srgbClr val="C00000"/>
+                </a:solidFill>
+              </a:rPr>
+              <a:t>Final/Phase 4 Presentation</a:t>
+            </a:r>
+          </a:p>
+        </p:txBody>
+      </p:sp>
+      <p:sp>
+        <p:nvSpPr>
+          <p:cNvPr id="6" name="Content Placeholder 5">
+            <a:extLst>
+              <a:ext uri="{FF2B5EF4-FFF2-40B4-BE49-F238E27FC236}">
+                <a16:creationId xmlns:a16="http://schemas.microsoft.com/office/drawing/2014/main" id="{0272A82C-1FFE-1388-6E1C-AE7992B314A6}"/>
+              </a:ext>
+            </a:extLst>
+          </p:cNvPr>
+          <p:cNvSpPr>
+            <a:spLocks noGrp="1"/>
+          </p:cNvSpPr>
+          <p:nvPr>
+            <p:ph idx="1"/>
+          </p:nvPr>
+        </p:nvSpPr>
+        <p:spPr>
+          <a:xfrm>
+            <a:off x="628649" y="1690689"/>
+            <a:ext cx="8186577" cy="4486274"/>
+          </a:xfrm>
+        </p:spPr>
+        <p:txBody>
+          <a:bodyPr>
+            <a:normAutofit/>
+          </a:bodyPr>
+          <a:lstStyle/>
+          <a:p>
+            <a:r>
+              <a:rPr lang="en-US" sz="2000" i="1" u="sng" dirty="0">
+                <a:highlight>
+                  <a:srgbClr val="FFFF00"/>
+                </a:highlight>
+              </a:rPr>
+              <a:t>Welcome</a:t>
+            </a:r>
+            <a:r>
+              <a:rPr lang="en-US" sz="2000" dirty="0">
+                <a:highlight>
+                  <a:srgbClr val="FFFF00"/>
+                </a:highlight>
+              </a:rPr>
+              <a:t> to invite </a:t>
+            </a:r>
+            <a:r>
+              <a:rPr lang="en-US" sz="2000" b="1" dirty="0">
+                <a:highlight>
+                  <a:srgbClr val="FFFF00"/>
+                </a:highlight>
+              </a:rPr>
+              <a:t>sponsors</a:t>
+            </a:r>
+            <a:r>
+              <a:rPr lang="en-US" sz="2000" dirty="0">
+                <a:highlight>
+                  <a:srgbClr val="FFFF00"/>
+                </a:highlight>
+              </a:rPr>
+              <a:t> </a:t>
+            </a:r>
+            <a:r>
+              <a:rPr lang="en-US" sz="2000" baseline="30000" dirty="0">
+                <a:highlight>
+                  <a:srgbClr val="FFFF00"/>
+                </a:highlight>
+              </a:rPr>
+              <a:t>(and others)</a:t>
+            </a:r>
+            <a:r>
+              <a:rPr lang="en-US" sz="2000" dirty="0">
+                <a:highlight>
+                  <a:srgbClr val="FFFF00"/>
+                </a:highlight>
+              </a:rPr>
+              <a:t> to attend your presentation</a:t>
+            </a:r>
+          </a:p>
+          <a:p>
+            <a:endParaRPr lang="en-US" sz="2000" dirty="0"/>
+          </a:p>
+          <a:p>
+            <a:endParaRPr lang="en-US" sz="2000" dirty="0"/>
+          </a:p>
+          <a:p>
+            <a:endParaRPr lang="en-US" sz="2000" dirty="0"/>
+          </a:p>
+          <a:p>
+            <a:endParaRPr lang="en-US" sz="2000" dirty="0"/>
+          </a:p>
+          <a:p>
+            <a:endParaRPr lang="en-US" sz="2000" dirty="0"/>
+          </a:p>
+          <a:p>
+            <a:endParaRPr lang="en-US" sz="2000" dirty="0"/>
+          </a:p>
+          <a:p>
+            <a:endParaRPr lang="en-US" sz="2000" dirty="0"/>
+          </a:p>
+          <a:p>
+            <a:r>
+              <a:rPr lang="en-US" sz="2000" dirty="0"/>
+              <a:t>Coordinate if you need something</a:t>
+            </a:r>
+          </a:p>
+          <a:p>
+            <a:pPr lvl="1"/>
+            <a:r>
+              <a:rPr lang="en-US" sz="2000" dirty="0"/>
+              <a:t>Such as parking</a:t>
+            </a:r>
+          </a:p>
+        </p:txBody>
+      </p:sp>
+      <p:sp>
+        <p:nvSpPr>
+          <p:cNvPr id="4" name="Slide Number Placeholder 3">
+            <a:extLst>
+              <a:ext uri="{FF2B5EF4-FFF2-40B4-BE49-F238E27FC236}">
+                <a16:creationId xmlns:a16="http://schemas.microsoft.com/office/drawing/2014/main" id="{D6462AC9-4EC4-1628-E54E-330A66D52516}"/>
+              </a:ext>
+            </a:extLst>
+          </p:cNvPr>
+          <p:cNvSpPr>
+            <a:spLocks noGrp="1"/>
+          </p:cNvSpPr>
+          <p:nvPr>
+            <p:ph type="sldNum" sz="quarter" idx="12"/>
+          </p:nvPr>
+        </p:nvSpPr>
+        <p:spPr/>
+        <p:txBody>
+          <a:bodyPr/>
+          <a:lstStyle/>
+          <a:p>
+            <a:fld id="{727B0ACA-53D9-FB44-A37C-A778C10B232A}" type="slidenum">
+              <a:rPr lang="en-US" smtClean="0"/>
+              <a:t>5</a:t>
+            </a:fld>
+            <a:endParaRPr lang="en-US"/>
+          </a:p>
+        </p:txBody>
+      </p:sp>
+      <p:pic>
+        <p:nvPicPr>
+          <p:cNvPr id="3" name="Picture 2">
+            <a:extLst>
+              <a:ext uri="{FF2B5EF4-FFF2-40B4-BE49-F238E27FC236}">
+                <a16:creationId xmlns:a16="http://schemas.microsoft.com/office/drawing/2014/main" id="{90239E35-FBD2-A554-C89D-78A8FAE099B1}"/>
+              </a:ext>
+            </a:extLst>
+          </p:cNvPr>
+          <p:cNvPicPr>
+            <a:picLocks noChangeAspect="1"/>
+          </p:cNvPicPr>
+          <p:nvPr/>
+        </p:nvPicPr>
+        <p:blipFill>
+          <a:blip r:embed="rId2"/>
+          <a:stretch>
+            <a:fillRect/>
+          </a:stretch>
+        </p:blipFill>
+        <p:spPr>
+          <a:xfrm>
+            <a:off x="2743200" y="2121532"/>
+            <a:ext cx="3657600" cy="2283818"/>
+          </a:xfrm>
+          <a:prstGeom prst="rect">
+            <a:avLst/>
+          </a:prstGeom>
+        </p:spPr>
+      </p:pic>
+      <p:pic>
+        <p:nvPicPr>
+          <p:cNvPr id="8" name="Picture 7">
+            <a:extLst>
+              <a:ext uri="{FF2B5EF4-FFF2-40B4-BE49-F238E27FC236}">
+                <a16:creationId xmlns:a16="http://schemas.microsoft.com/office/drawing/2014/main" id="{856A2145-8CC9-4B67-B1B3-DACEC14DBB8F}"/>
+              </a:ext>
+            </a:extLst>
+          </p:cNvPr>
+          <p:cNvPicPr>
+            <a:picLocks noChangeAspect="1"/>
+          </p:cNvPicPr>
+          <p:nvPr/>
+        </p:nvPicPr>
+        <p:blipFill>
+          <a:blip r:embed="rId3"/>
+          <a:stretch>
+            <a:fillRect/>
+          </a:stretch>
+        </p:blipFill>
+        <p:spPr>
+          <a:xfrm>
+            <a:off x="3246120" y="5322191"/>
+            <a:ext cx="2286000" cy="1323975"/>
+          </a:xfrm>
+          <a:prstGeom prst="rect">
+            <a:avLst/>
+          </a:prstGeom>
+        </p:spPr>
+      </p:pic>
+    </p:spTree>
+    <p:extLst>
+      <p:ext uri="{BB962C8B-B14F-4D97-AF65-F5344CB8AC3E}">
+        <p14:creationId xmlns:p14="http://schemas.microsoft.com/office/powerpoint/2010/main" val="969056127"/>
+      </p:ext>
+    </p:extLst>
+  </p:cSld>
+  <p:clrMapOvr>
+    <a:masterClrMapping/>
+  </p:clrMapOvr>
+</p:sld>
+</file>
+
+<file path=ppt/slides/slide6.xml><?xml version="1.0" encoding="utf-8"?>
+<p:sld xmlns:a="http://schemas.openxmlformats.org/drawingml/2006/main" xmlns:r="http://schemas.openxmlformats.org/officeDocument/2006/relationships" xmlns:p="http://schemas.openxmlformats.org/presentationml/2006/main">
+  <p:cSld>
+    <p:spTree>
+      <p:nvGrpSpPr>
+        <p:cNvPr id="1" name="">
+          <a:extLst>
+            <a:ext uri="{FF2B5EF4-FFF2-40B4-BE49-F238E27FC236}">
+              <a16:creationId xmlns:a16="http://schemas.microsoft.com/office/drawing/2014/main" id="{6C63EB0F-58B5-AF94-0961-30BA330EF37C}"/>
+            </a:ext>
+          </a:extLst>
+        </p:cNvPr>
+        <p:cNvGrpSpPr/>
+        <p:nvPr/>
+      </p:nvGrpSpPr>
+      <p:grpSpPr>
+        <a:xfrm>
+          <a:off x="0" y="0"/>
+          <a:ext cx="0" cy="0"/>
+          <a:chOff x="0" y="0"/>
+          <a:chExt cx="0" cy="0"/>
+        </a:xfrm>
+      </p:grpSpPr>
+      <p:sp>
+        <p:nvSpPr>
+          <p:cNvPr id="5" name="Title 4">
+            <a:extLst>
+              <a:ext uri="{FF2B5EF4-FFF2-40B4-BE49-F238E27FC236}">
+                <a16:creationId xmlns:a16="http://schemas.microsoft.com/office/drawing/2014/main" id="{1CF9FD79-8BDF-723A-BA1E-AC7C272FBCAB}"/>
+              </a:ext>
+            </a:extLst>
+          </p:cNvPr>
+          <p:cNvSpPr>
+            <a:spLocks noGrp="1"/>
+          </p:cNvSpPr>
+          <p:nvPr>
+            <p:ph type="title"/>
+          </p:nvPr>
+        </p:nvSpPr>
+        <p:spPr/>
+        <p:txBody>
+          <a:bodyPr/>
+          <a:lstStyle/>
+          <a:p>
+            <a:r>
+              <a:rPr lang="en-US" b="1" dirty="0">
+                <a:solidFill>
+                  <a:srgbClr val="C00000"/>
+                </a:solidFill>
+              </a:rPr>
+              <a:t>Peer Evaluation</a:t>
+            </a:r>
+          </a:p>
+        </p:txBody>
+      </p:sp>
+      <p:sp>
+        <p:nvSpPr>
+          <p:cNvPr id="6" name="Content Placeholder 5">
+            <a:extLst>
+              <a:ext uri="{FF2B5EF4-FFF2-40B4-BE49-F238E27FC236}">
+                <a16:creationId xmlns:a16="http://schemas.microsoft.com/office/drawing/2014/main" id="{E6EAE2D7-A0EC-D8F4-DF5D-B824AE89B4D5}"/>
+              </a:ext>
+            </a:extLst>
+          </p:cNvPr>
+          <p:cNvSpPr>
+            <a:spLocks noGrp="1"/>
+          </p:cNvSpPr>
+          <p:nvPr>
+            <p:ph idx="1"/>
+          </p:nvPr>
+        </p:nvSpPr>
+        <p:spPr>
+          <a:xfrm>
+            <a:off x="628650" y="1690689"/>
+            <a:ext cx="7886700" cy="4486274"/>
+          </a:xfrm>
+        </p:spPr>
+        <p:txBody>
+          <a:bodyPr>
+            <a:normAutofit/>
+          </a:bodyPr>
+          <a:lstStyle/>
+          <a:p>
+            <a:r>
+              <a:rPr lang="en-US" sz="2200" b="1" dirty="0"/>
+              <a:t>Forms</a:t>
+            </a:r>
+          </a:p>
+          <a:p>
+            <a:pPr lvl="1"/>
+            <a:r>
+              <a:rPr lang="en-US" dirty="0"/>
+              <a:t>Developing this week</a:t>
+            </a:r>
+            <a:endParaRPr lang="en-US" sz="2200" dirty="0"/>
+          </a:p>
+          <a:p>
+            <a:pPr lvl="1"/>
+            <a:r>
+              <a:rPr lang="en-US" sz="2200" dirty="0"/>
+              <a:t>Peer Evaluation due after the final report</a:t>
+            </a:r>
+          </a:p>
+          <a:p>
+            <a:pPr lvl="1"/>
+            <a:r>
+              <a:rPr lang="en-US" sz="2200" dirty="0"/>
+              <a:t>You will rate your performance on the project as well as teammates</a:t>
+            </a:r>
+          </a:p>
+          <a:p>
+            <a:r>
+              <a:rPr lang="en-US" sz="2200" b="1" dirty="0"/>
+              <a:t>A grade (12% of overall grade) determined using:</a:t>
+            </a:r>
+          </a:p>
+          <a:p>
+            <a:pPr lvl="1"/>
+            <a:r>
+              <a:rPr lang="en-US" sz="1600" dirty="0"/>
+              <a:t>Peer Evaluation ratings and comments</a:t>
+            </a:r>
+          </a:p>
+          <a:p>
+            <a:pPr lvl="1"/>
+            <a:r>
+              <a:rPr lang="en-US" sz="1600" dirty="0"/>
+              <a:t>Class attendance/tardiness/participation</a:t>
+            </a:r>
+          </a:p>
+          <a:p>
+            <a:pPr lvl="1"/>
+            <a:r>
+              <a:rPr lang="en-US" sz="1600" dirty="0"/>
+              <a:t>Instructors' observation of </a:t>
+            </a:r>
+            <a:br>
+              <a:rPr lang="en-US" sz="1600" dirty="0"/>
+            </a:br>
+            <a:r>
+              <a:rPr lang="en-US" sz="1600" dirty="0"/>
+              <a:t>team participation/contribution</a:t>
+            </a:r>
+          </a:p>
+        </p:txBody>
+      </p:sp>
+      <p:sp>
+        <p:nvSpPr>
+          <p:cNvPr id="4" name="Slide Number Placeholder 3">
+            <a:extLst>
+              <a:ext uri="{FF2B5EF4-FFF2-40B4-BE49-F238E27FC236}">
+                <a16:creationId xmlns:a16="http://schemas.microsoft.com/office/drawing/2014/main" id="{C05CCFD4-EDD2-47EB-5E4C-A72840239372}"/>
+              </a:ext>
+            </a:extLst>
+          </p:cNvPr>
+          <p:cNvSpPr>
+            <a:spLocks noGrp="1"/>
+          </p:cNvSpPr>
+          <p:nvPr>
+            <p:ph type="sldNum" sz="quarter" idx="12"/>
+          </p:nvPr>
+        </p:nvSpPr>
+        <p:spPr/>
+        <p:txBody>
+          <a:bodyPr/>
+          <a:lstStyle/>
+          <a:p>
+            <a:fld id="{727B0ACA-53D9-FB44-A37C-A778C10B232A}" type="slidenum">
+              <a:rPr lang="en-US" smtClean="0"/>
+              <a:t>6</a:t>
+            </a:fld>
+            <a:endParaRPr lang="en-US"/>
+          </a:p>
+        </p:txBody>
+      </p:sp>
+      <p:pic>
+        <p:nvPicPr>
+          <p:cNvPr id="8" name="Picture 7">
+            <a:extLst>
+              <a:ext uri="{FF2B5EF4-FFF2-40B4-BE49-F238E27FC236}">
+                <a16:creationId xmlns:a16="http://schemas.microsoft.com/office/drawing/2014/main" id="{DEB6AB34-3CDE-8DF7-A7BF-344F2BB129F4}"/>
+              </a:ext>
+            </a:extLst>
+          </p:cNvPr>
+          <p:cNvPicPr>
+            <a:picLocks noChangeAspect="1"/>
+          </p:cNvPicPr>
+          <p:nvPr/>
+        </p:nvPicPr>
+        <p:blipFill>
+          <a:blip r:embed="rId2"/>
+          <a:stretch>
+            <a:fillRect/>
+          </a:stretch>
+        </p:blipFill>
+        <p:spPr>
+          <a:xfrm>
+            <a:off x="5556997" y="4165283"/>
+            <a:ext cx="2958353" cy="2011680"/>
+          </a:xfrm>
+          <a:prstGeom prst="rect">
+            <a:avLst/>
+          </a:prstGeom>
+        </p:spPr>
+      </p:pic>
+    </p:spTree>
+    <p:extLst>
+      <p:ext uri="{BB962C8B-B14F-4D97-AF65-F5344CB8AC3E}">
+        <p14:creationId xmlns:p14="http://schemas.microsoft.com/office/powerpoint/2010/main" val="284714922"/>
+      </p:ext>
+    </p:extLst>
+  </p:cSld>
+  <p:clrMapOvr>
+    <a:masterClrMapping/>
+  </p:clrMapOvr>
+</p:sld>
+</file>
+
+<file path=ppt/slides/slide7.xml><?xml version="1.0" encoding="utf-8"?>
 <p:sld xmlns:a="http://schemas.openxmlformats.org/drawingml/2006/main" xmlns:r="http://schemas.openxmlformats.org/officeDocument/2006/relationships" xmlns:p="http://schemas.openxmlformats.org/presentationml/2006/main">
   <p:cSld>
     <p:bg>
@@ -6947,7 +7554,7 @@
           <a:p>
             <a:fld id="{727B0ACA-53D9-FB44-A37C-A778C10B232A}" type="slidenum">
               <a:rPr lang="en-US" smtClean="0"/>
-              <a:t>4</a:t>
+              <a:t>7</a:t>
             </a:fld>
             <a:endParaRPr lang="en-US"/>
           </a:p>
@@ -7030,7 +7637,7 @@
 </p:sld>
 </file>
 
-<file path=ppt/slides/slide5.xml><?xml version="1.0" encoding="utf-8"?>
+<file path=ppt/slides/slide8.xml><?xml version="1.0" encoding="utf-8"?>
 <p:sld xmlns:a="http://schemas.openxmlformats.org/drawingml/2006/main" xmlns:r="http://schemas.openxmlformats.org/officeDocument/2006/relationships" xmlns:p="http://schemas.openxmlformats.org/presentationml/2006/main">
   <p:cSld>
     <p:spTree>
@@ -7175,27 +7782,35 @@
               <a:t>, and </a:t>
             </a:r>
             <a:r>
-              <a:rPr lang="en-US" b="1" dirty="0">
+              <a:rPr lang="en-US" b="1" dirty="0"/>
+              <a:t>solve</a:t>
+            </a:r>
+            <a:r>
+              <a:rPr lang="en-US" dirty="0"/>
+              <a:t> </a:t>
+            </a:r>
+            <a:r>
+              <a:rPr lang="en-US" u="sng" dirty="0"/>
+              <a:t>complex engineering problems</a:t>
+            </a:r>
+            <a:br>
+              <a:rPr lang="en-US" u="sng" dirty="0"/>
+            </a:br>
+            <a:r>
+              <a:rPr lang="en-US" dirty="0"/>
+              <a:t>by applying </a:t>
+            </a:r>
+            <a:r>
+              <a:rPr lang="en-US" dirty="0">
                 <a:highlight>
                   <a:srgbClr val="FFFF00"/>
                 </a:highlight>
               </a:rPr>
-              <a:t>solve</a:t>
+              <a:t>principles</a:t>
             </a:r>
             <a:r>
               <a:rPr lang="en-US" dirty="0"/>
-              <a:t> </a:t>
-            </a:r>
-            <a:r>
-              <a:rPr lang="en-US" u="sng" dirty="0"/>
-              <a:t>complex engineering problems</a:t>
-            </a:r>
-            <a:br>
-              <a:rPr lang="en-US" u="sng" dirty="0"/>
-            </a:br>
-            <a:r>
-              <a:rPr lang="en-US" dirty="0"/>
-              <a:t>by applying principles of </a:t>
+              <a:t> of </a:t>
             </a:r>
             <a:r>
               <a:rPr lang="en-US" u="sng" dirty="0"/>
@@ -7235,23 +7850,23 @@
             </a:pPr>
             <a:r>
               <a:rPr lang="en-US" b="1" dirty="0"/>
-              <a:t>Apply engineering </a:t>
-            </a:r>
-            <a:r>
-              <a:rPr lang="en-US" b="1" dirty="0">
+              <a:t>Apply engineering design </a:t>
+            </a:r>
+            <a:r>
+              <a:rPr lang="en-US" dirty="0"/>
+              <a:t>to produce solutions that meet specified needs with </a:t>
+            </a:r>
+            <a:r>
+              <a:rPr lang="en-US" dirty="0">
                 <a:highlight>
                   <a:srgbClr val="FFFF00"/>
                 </a:highlight>
               </a:rPr>
-              <a:t>design</a:t>
-            </a:r>
-            <a:r>
-              <a:rPr lang="en-US" b="1" dirty="0"/>
-              <a:t> </a:t>
+              <a:t>consideration</a:t>
             </a:r>
             <a:r>
               <a:rPr lang="en-US" dirty="0"/>
-              <a:t>to produce solutions that meet specified needs with consideration of public health, safety, and welfare, as well as global, cultural, social, environmental, and economic factors.</a:t>
+              <a:t> of public health, safety, and welfare, as well as global, cultural, social, environmental, and economic factors.</a:t>
             </a:r>
           </a:p>
           <a:p>
@@ -7266,12 +7881,16 @@
               <a:buAutoNum type="arabicPeriod"/>
             </a:pPr>
             <a:r>
-              <a:rPr lang="en-US" b="1" dirty="0">
+              <a:rPr lang="en-US" b="1" dirty="0"/>
+              <a:t>Communicate </a:t>
+            </a:r>
+            <a:r>
+              <a:rPr lang="en-US" dirty="0">
                 <a:highlight>
-                  <a:srgbClr val="00FFFF"/>
+                  <a:srgbClr val="FFFF00"/>
                 </a:highlight>
               </a:rPr>
-              <a:t>Communicate effectively</a:t>
+              <a:t>effectively</a:t>
             </a:r>
             <a:r>
               <a:rPr lang="en-US" b="1" dirty="0"/>
@@ -7299,11 +7918,11 @@
                   <a:srgbClr val="FFFF00"/>
                 </a:highlight>
               </a:rPr>
-              <a:t>Recognize ethical and professional responsibilities</a:t>
+              <a:t>Recognize</a:t>
             </a:r>
             <a:r>
               <a:rPr lang="en-US" b="1" dirty="0"/>
-              <a:t> </a:t>
+              <a:t> ethical and professional responsibilities </a:t>
             </a:r>
             <a:r>
               <a:rPr lang="en-US" dirty="0"/>
@@ -7337,30 +7956,26 @@
             </a:pPr>
             <a:r>
               <a:rPr lang="en-US" b="1" dirty="0"/>
-              <a:t>Function </a:t>
-            </a:r>
-            <a:r>
-              <a:rPr lang="en-US" b="1" dirty="0">
+              <a:t>Function effectively on a team </a:t>
+            </a:r>
+            <a:r>
+              <a:rPr lang="en-US" dirty="0"/>
+              <a:t>whose members together provide leadership, create a collaborative and inclusive environment, </a:t>
+            </a:r>
+            <a:br>
+              <a:rPr lang="en-US" dirty="0"/>
+            </a:br>
+            <a:r>
+              <a:rPr lang="en-US" dirty="0">
                 <a:highlight>
                   <a:srgbClr val="FFFF00"/>
                 </a:highlight>
               </a:rPr>
-              <a:t>effectively on a team</a:t>
-            </a:r>
-            <a:r>
-              <a:rPr lang="en-US" b="1" dirty="0"/>
-              <a:t> </a:t>
+              <a:t>establish</a:t>
             </a:r>
             <a:r>
               <a:rPr lang="en-US" dirty="0"/>
-              <a:t>whose members together provide leadership, create a collaborative and inclusive environment, </a:t>
-            </a:r>
-            <a:br>
-              <a:rPr lang="en-US" dirty="0"/>
-            </a:br>
-            <a:r>
-              <a:rPr lang="en-US" dirty="0"/>
-              <a:t>establish goals, plan tasks and meet objectives.</a:t>
+              <a:t> goals, plan tasks and meet objectives.</a:t>
             </a:r>
           </a:p>
           <a:p>
@@ -7376,19 +7991,19 @@
             </a:pPr>
             <a:r>
               <a:rPr lang="en-US" b="1" dirty="0"/>
-              <a:t>Develop and conduct appropriate </a:t>
+              <a:t>Develop and conduct </a:t>
             </a:r>
             <a:r>
               <a:rPr lang="en-US" b="1" dirty="0">
                 <a:highlight>
-                  <a:srgbClr val="00FFFF"/>
+                  <a:srgbClr val="FFFF00"/>
                 </a:highlight>
               </a:rPr>
-              <a:t>experimentation, analyze and interpret data</a:t>
+              <a:t>appropriate</a:t>
             </a:r>
             <a:r>
               <a:rPr lang="en-US" b="1" dirty="0"/>
-              <a:t> </a:t>
+              <a:t> experimentation, analyze and interpret data </a:t>
             </a:r>
             <a:r>
               <a:rPr lang="en-US" dirty="0"/>
@@ -7415,23 +8030,31 @@
               <a:buAutoNum type="arabicPeriod"/>
             </a:pPr>
             <a:r>
-              <a:rPr lang="en-US" b="1" dirty="0">
+              <a:rPr lang="en-US" b="1" dirty="0"/>
+              <a:t>Acquire and apply new knowledge as needed</a:t>
+            </a:r>
+            <a:r>
+              <a:rPr lang="en-US" dirty="0"/>
+              <a:t>, </a:t>
+            </a:r>
+            <a:br>
+              <a:rPr lang="en-US" dirty="0"/>
+            </a:br>
+            <a:r>
+              <a:rPr lang="en-US" dirty="0"/>
+              <a:t>using </a:t>
+            </a:r>
+            <a:r>
+              <a:rPr lang="en-US" dirty="0">
                 <a:highlight>
                   <a:srgbClr val="FFFF00"/>
                 </a:highlight>
               </a:rPr>
-              <a:t>Acquire and apply new knowledge as needed</a:t>
+              <a:t>appropriate</a:t>
             </a:r>
             <a:r>
               <a:rPr lang="en-US" dirty="0"/>
-              <a:t>, </a:t>
-            </a:r>
-            <a:br>
-              <a:rPr lang="en-US" dirty="0"/>
-            </a:br>
-            <a:r>
-              <a:rPr lang="en-US" dirty="0"/>
-              <a:t>using appropriate learning strategies.</a:t>
+              <a:t> learning strategies.</a:t>
             </a:r>
           </a:p>
         </p:txBody>
@@ -7459,7 +8082,7 @@
           <a:p>
             <a:fld id="{727B0ACA-53D9-FB44-A37C-A778C10B232A}" type="slidenum">
               <a:rPr lang="en-US" smtClean="0"/>
-              <a:t>5</a:t>
+              <a:t>8</a:t>
             </a:fld>
             <a:endParaRPr lang="en-US"/>
           </a:p>
@@ -7469,567 +8092,6 @@
     <p:extLst>
       <p:ext uri="{BB962C8B-B14F-4D97-AF65-F5344CB8AC3E}">
         <p14:creationId xmlns:p14="http://schemas.microsoft.com/office/powerpoint/2010/main" val="1121670017"/>
-      </p:ext>
-    </p:extLst>
-  </p:cSld>
-  <p:clrMapOvr>
-    <a:masterClrMapping/>
-  </p:clrMapOvr>
-</p:sld>
-</file>
-
-<file path=ppt/slides/slide6.xml><?xml version="1.0" encoding="utf-8"?>
-<p:sld xmlns:a="http://schemas.openxmlformats.org/drawingml/2006/main" xmlns:r="http://schemas.openxmlformats.org/officeDocument/2006/relationships" xmlns:p="http://schemas.openxmlformats.org/presentationml/2006/main">
-  <p:cSld>
-    <p:spTree>
-      <p:nvGrpSpPr>
-        <p:cNvPr id="1" name=""/>
-        <p:cNvGrpSpPr/>
-        <p:nvPr/>
-      </p:nvGrpSpPr>
-      <p:grpSpPr>
-        <a:xfrm>
-          <a:off x="0" y="0"/>
-          <a:ext cx="0" cy="0"/>
-          <a:chOff x="0" y="0"/>
-          <a:chExt cx="0" cy="0"/>
-        </a:xfrm>
-      </p:grpSpPr>
-      <p:sp>
-        <p:nvSpPr>
-          <p:cNvPr id="5" name="Title 4">
-            <a:extLst>
-              <a:ext uri="{FF2B5EF4-FFF2-40B4-BE49-F238E27FC236}">
-                <a16:creationId xmlns:a16="http://schemas.microsoft.com/office/drawing/2014/main" id="{68BE5633-9F5C-F7CE-0B3B-76A5E3D0E5EF}"/>
-              </a:ext>
-            </a:extLst>
-          </p:cNvPr>
-          <p:cNvSpPr>
-            <a:spLocks noGrp="1"/>
-          </p:cNvSpPr>
-          <p:nvPr>
-            <p:ph type="title"/>
-          </p:nvPr>
-        </p:nvSpPr>
-        <p:spPr/>
-        <p:txBody>
-          <a:bodyPr/>
-          <a:lstStyle/>
-          <a:p>
-            <a:r>
-              <a:rPr lang="en-US" b="1" dirty="0">
-                <a:solidFill>
-                  <a:srgbClr val="C00000"/>
-                </a:solidFill>
-              </a:rPr>
-              <a:t>Upcoming Semester Schedule</a:t>
-            </a:r>
-          </a:p>
-        </p:txBody>
-      </p:sp>
-      <p:sp>
-        <p:nvSpPr>
-          <p:cNvPr id="6" name="Content Placeholder 5">
-            <a:extLst>
-              <a:ext uri="{FF2B5EF4-FFF2-40B4-BE49-F238E27FC236}">
-                <a16:creationId xmlns:a16="http://schemas.microsoft.com/office/drawing/2014/main" id="{DC56BA54-B0C5-3CDD-E853-8A76DC39F15C}"/>
-              </a:ext>
-            </a:extLst>
-          </p:cNvPr>
-          <p:cNvSpPr>
-            <a:spLocks noGrp="1"/>
-          </p:cNvSpPr>
-          <p:nvPr>
-            <p:ph idx="1"/>
-          </p:nvPr>
-        </p:nvSpPr>
-        <p:spPr>
-          <a:xfrm>
-            <a:off x="628650" y="1690689"/>
-            <a:ext cx="7886700" cy="4486274"/>
-          </a:xfrm>
-        </p:spPr>
-        <p:txBody>
-          <a:bodyPr>
-            <a:normAutofit/>
-          </a:bodyPr>
-          <a:lstStyle/>
-          <a:p>
-            <a:r>
-              <a:rPr lang="en-US" sz="2200" dirty="0"/>
-              <a:t>4/14 </a:t>
-            </a:r>
-            <a:r>
-              <a:rPr lang="en-US" sz="2200" b="1" dirty="0"/>
-              <a:t>Phase 4 Presentations BH/COE</a:t>
-            </a:r>
-          </a:p>
-          <a:p>
-            <a:r>
-              <a:rPr lang="en-US" sz="2200" dirty="0"/>
-              <a:t>4/14 </a:t>
-            </a:r>
-            <a:r>
-              <a:rPr lang="en-US" sz="2200" baseline="30000" dirty="0"/>
-              <a:t>mandatory attendance for all 2:15-3:15</a:t>
-            </a:r>
-            <a:r>
-              <a:rPr lang="en-US" sz="2200" dirty="0"/>
-              <a:t> </a:t>
-            </a:r>
-            <a:r>
-              <a:rPr lang="en-US" sz="2200" b="1" dirty="0"/>
-              <a:t>Senior Exit Interviews</a:t>
-            </a:r>
-          </a:p>
-          <a:p>
-            <a:r>
-              <a:rPr lang="en-US" sz="2200" dirty="0"/>
-              <a:t>4/21 </a:t>
-            </a:r>
-            <a:r>
-              <a:rPr lang="en-US" sz="2200" b="1" dirty="0"/>
-              <a:t>Phase 4 Presentations ML</a:t>
-            </a:r>
-          </a:p>
-          <a:p>
-            <a:r>
-              <a:rPr lang="en-US" sz="2200" dirty="0"/>
-              <a:t>4/24 </a:t>
-            </a:r>
-            <a:r>
-              <a:rPr lang="en-US" sz="2200" baseline="30000" dirty="0"/>
-              <a:t>in-person, all day</a:t>
-            </a:r>
-            <a:r>
-              <a:rPr lang="en-US" sz="2200" dirty="0"/>
-              <a:t> </a:t>
-            </a:r>
-            <a:r>
-              <a:rPr lang="en-US" sz="2200" b="1" dirty="0"/>
-              <a:t>COE Showcase</a:t>
-            </a:r>
-            <a:br>
-              <a:rPr lang="en-US" sz="2200" dirty="0"/>
-            </a:br>
-            <a:r>
-              <a:rPr lang="en-US" sz="1800" dirty="0"/>
-              <a:t>schedule at </a:t>
-            </a:r>
-            <a:r>
-              <a:rPr lang="en-US" sz="1800" dirty="0">
-                <a:hlinkClick r:id="rId2"/>
-              </a:rPr>
-              <a:t>https://tamueps.secure-platform.com/</a:t>
-            </a:r>
-            <a:br>
-              <a:rPr lang="en-US" sz="1800" dirty="0"/>
-            </a:br>
-            <a:br>
-              <a:rPr lang="en-US" sz="1800" dirty="0"/>
-            </a:br>
-            <a:br>
-              <a:rPr lang="en-US" sz="1800" dirty="0"/>
-            </a:br>
-            <a:br>
-              <a:rPr lang="en-US" sz="1800" dirty="0"/>
-            </a:br>
-            <a:endParaRPr lang="en-US" sz="1800" dirty="0"/>
-          </a:p>
-          <a:p>
-            <a:r>
-              <a:rPr lang="en-US" sz="2200" dirty="0"/>
-              <a:t>5/5</a:t>
-            </a:r>
-            <a:r>
-              <a:rPr lang="en-US" sz="2200" baseline="30000" dirty="0"/>
-              <a:t>5 PM</a:t>
-            </a:r>
-            <a:r>
-              <a:rPr lang="en-US" sz="2200" dirty="0"/>
-              <a:t> </a:t>
-            </a:r>
-            <a:r>
-              <a:rPr lang="en-US" sz="2200" b="1" dirty="0"/>
-              <a:t>Final Report Due</a:t>
-            </a:r>
-          </a:p>
-        </p:txBody>
-      </p:sp>
-      <p:sp>
-        <p:nvSpPr>
-          <p:cNvPr id="4" name="Slide Number Placeholder 3">
-            <a:extLst>
-              <a:ext uri="{FF2B5EF4-FFF2-40B4-BE49-F238E27FC236}">
-                <a16:creationId xmlns:a16="http://schemas.microsoft.com/office/drawing/2014/main" id="{BF926C73-35A2-D42C-CDED-8F3C0FD932A2}"/>
-              </a:ext>
-            </a:extLst>
-          </p:cNvPr>
-          <p:cNvSpPr>
-            <a:spLocks noGrp="1"/>
-          </p:cNvSpPr>
-          <p:nvPr>
-            <p:ph type="sldNum" sz="quarter" idx="12"/>
-          </p:nvPr>
-        </p:nvSpPr>
-        <p:spPr/>
-        <p:txBody>
-          <a:bodyPr/>
-          <a:lstStyle/>
-          <a:p>
-            <a:fld id="{727B0ACA-53D9-FB44-A37C-A778C10B232A}" type="slidenum">
-              <a:rPr lang="en-US" smtClean="0"/>
-              <a:t>6</a:t>
-            </a:fld>
-            <a:endParaRPr lang="en-US"/>
-          </a:p>
-        </p:txBody>
-      </p:sp>
-      <p:pic>
-        <p:nvPicPr>
-          <p:cNvPr id="3" name="Picture 2">
-            <a:extLst>
-              <a:ext uri="{FF2B5EF4-FFF2-40B4-BE49-F238E27FC236}">
-                <a16:creationId xmlns:a16="http://schemas.microsoft.com/office/drawing/2014/main" id="{2FBC0925-F4B1-167B-7064-075541813205}"/>
-              </a:ext>
-            </a:extLst>
-          </p:cNvPr>
-          <p:cNvPicPr>
-            <a:picLocks noChangeAspect="1"/>
-          </p:cNvPicPr>
-          <p:nvPr/>
-        </p:nvPicPr>
-        <p:blipFill>
-          <a:blip r:embed="rId3"/>
-          <a:stretch>
-            <a:fillRect/>
-          </a:stretch>
-        </p:blipFill>
-        <p:spPr>
-          <a:xfrm>
-            <a:off x="924674" y="3601680"/>
-            <a:ext cx="6858000" cy="912227"/>
-          </a:xfrm>
-          <a:prstGeom prst="rect">
-            <a:avLst/>
-          </a:prstGeom>
-        </p:spPr>
-      </p:pic>
-    </p:spTree>
-    <p:extLst>
-      <p:ext uri="{BB962C8B-B14F-4D97-AF65-F5344CB8AC3E}">
-        <p14:creationId xmlns:p14="http://schemas.microsoft.com/office/powerpoint/2010/main" val="1461869108"/>
-      </p:ext>
-    </p:extLst>
-  </p:cSld>
-  <p:clrMapOvr>
-    <a:masterClrMapping/>
-  </p:clrMapOvr>
-</p:sld>
-</file>
-
-<file path=ppt/slides/slide7.xml><?xml version="1.0" encoding="utf-8"?>
-<p:sld xmlns:a="http://schemas.openxmlformats.org/drawingml/2006/main" xmlns:r="http://schemas.openxmlformats.org/officeDocument/2006/relationships" xmlns:p="http://schemas.openxmlformats.org/presentationml/2006/main">
-  <p:cSld>
-    <p:spTree>
-      <p:nvGrpSpPr>
-        <p:cNvPr id="1" name="">
-          <a:extLst>
-            <a:ext uri="{FF2B5EF4-FFF2-40B4-BE49-F238E27FC236}">
-              <a16:creationId xmlns:a16="http://schemas.microsoft.com/office/drawing/2014/main" id="{50671C1E-5C8D-2CE2-32D1-91AB9A21D834}"/>
-            </a:ext>
-          </a:extLst>
-        </p:cNvPr>
-        <p:cNvGrpSpPr/>
-        <p:nvPr/>
-      </p:nvGrpSpPr>
-      <p:grpSpPr>
-        <a:xfrm>
-          <a:off x="0" y="0"/>
-          <a:ext cx="0" cy="0"/>
-          <a:chOff x="0" y="0"/>
-          <a:chExt cx="0" cy="0"/>
-        </a:xfrm>
-      </p:grpSpPr>
-      <p:sp>
-        <p:nvSpPr>
-          <p:cNvPr id="5" name="Title 4">
-            <a:extLst>
-              <a:ext uri="{FF2B5EF4-FFF2-40B4-BE49-F238E27FC236}">
-                <a16:creationId xmlns:a16="http://schemas.microsoft.com/office/drawing/2014/main" id="{94864BC1-6CBF-7040-D785-377308C6A781}"/>
-              </a:ext>
-            </a:extLst>
-          </p:cNvPr>
-          <p:cNvSpPr>
-            <a:spLocks noGrp="1"/>
-          </p:cNvSpPr>
-          <p:nvPr>
-            <p:ph type="title"/>
-          </p:nvPr>
-        </p:nvSpPr>
-        <p:spPr/>
-        <p:txBody>
-          <a:bodyPr/>
-          <a:lstStyle/>
-          <a:p>
-            <a:r>
-              <a:rPr lang="en-US" b="1" dirty="0">
-                <a:solidFill>
-                  <a:srgbClr val="C00000"/>
-                </a:solidFill>
-              </a:rPr>
-              <a:t>Final/Phase 4 Presentation</a:t>
-            </a:r>
-          </a:p>
-        </p:txBody>
-      </p:sp>
-      <p:sp>
-        <p:nvSpPr>
-          <p:cNvPr id="6" name="Content Placeholder 5">
-            <a:extLst>
-              <a:ext uri="{FF2B5EF4-FFF2-40B4-BE49-F238E27FC236}">
-                <a16:creationId xmlns:a16="http://schemas.microsoft.com/office/drawing/2014/main" id="{0272A82C-1FFE-1388-6E1C-AE7992B314A6}"/>
-              </a:ext>
-            </a:extLst>
-          </p:cNvPr>
-          <p:cNvSpPr>
-            <a:spLocks noGrp="1"/>
-          </p:cNvSpPr>
-          <p:nvPr>
-            <p:ph idx="1"/>
-          </p:nvPr>
-        </p:nvSpPr>
-        <p:spPr>
-          <a:xfrm>
-            <a:off x="628650" y="1690689"/>
-            <a:ext cx="7886700" cy="4486274"/>
-          </a:xfrm>
-        </p:spPr>
-        <p:txBody>
-          <a:bodyPr>
-            <a:normAutofit/>
-          </a:bodyPr>
-          <a:lstStyle/>
-          <a:p>
-            <a:r>
-              <a:rPr lang="en-US" sz="2200" dirty="0"/>
-              <a:t>Welcome to invite sponsors to attend your presentation</a:t>
-            </a:r>
-          </a:p>
-          <a:p>
-            <a:r>
-              <a:rPr lang="en-US" sz="2200" dirty="0"/>
-              <a:t>Coordinate if you need to arrange parking for them</a:t>
-            </a:r>
-          </a:p>
-        </p:txBody>
-      </p:sp>
-      <p:sp>
-        <p:nvSpPr>
-          <p:cNvPr id="4" name="Slide Number Placeholder 3">
-            <a:extLst>
-              <a:ext uri="{FF2B5EF4-FFF2-40B4-BE49-F238E27FC236}">
-                <a16:creationId xmlns:a16="http://schemas.microsoft.com/office/drawing/2014/main" id="{D6462AC9-4EC4-1628-E54E-330A66D52516}"/>
-              </a:ext>
-            </a:extLst>
-          </p:cNvPr>
-          <p:cNvSpPr>
-            <a:spLocks noGrp="1"/>
-          </p:cNvSpPr>
-          <p:nvPr>
-            <p:ph type="sldNum" sz="quarter" idx="12"/>
-          </p:nvPr>
-        </p:nvSpPr>
-        <p:spPr/>
-        <p:txBody>
-          <a:bodyPr/>
-          <a:lstStyle/>
-          <a:p>
-            <a:fld id="{727B0ACA-53D9-FB44-A37C-A778C10B232A}" type="slidenum">
-              <a:rPr lang="en-US" smtClean="0"/>
-              <a:t>7</a:t>
-            </a:fld>
-            <a:endParaRPr lang="en-US"/>
-          </a:p>
-        </p:txBody>
-      </p:sp>
-    </p:spTree>
-    <p:extLst>
-      <p:ext uri="{BB962C8B-B14F-4D97-AF65-F5344CB8AC3E}">
-        <p14:creationId xmlns:p14="http://schemas.microsoft.com/office/powerpoint/2010/main" val="969056127"/>
-      </p:ext>
-    </p:extLst>
-  </p:cSld>
-  <p:clrMapOvr>
-    <a:masterClrMapping/>
-  </p:clrMapOvr>
-</p:sld>
-</file>
-
-<file path=ppt/slides/slide8.xml><?xml version="1.0" encoding="utf-8"?>
-<p:sld xmlns:a="http://schemas.openxmlformats.org/drawingml/2006/main" xmlns:r="http://schemas.openxmlformats.org/officeDocument/2006/relationships" xmlns:p="http://schemas.openxmlformats.org/presentationml/2006/main">
-  <p:cSld>
-    <p:spTree>
-      <p:nvGrpSpPr>
-        <p:cNvPr id="1" name="">
-          <a:extLst>
-            <a:ext uri="{FF2B5EF4-FFF2-40B4-BE49-F238E27FC236}">
-              <a16:creationId xmlns:a16="http://schemas.microsoft.com/office/drawing/2014/main" id="{6C63EB0F-58B5-AF94-0961-30BA330EF37C}"/>
-            </a:ext>
-          </a:extLst>
-        </p:cNvPr>
-        <p:cNvGrpSpPr/>
-        <p:nvPr/>
-      </p:nvGrpSpPr>
-      <p:grpSpPr>
-        <a:xfrm>
-          <a:off x="0" y="0"/>
-          <a:ext cx="0" cy="0"/>
-          <a:chOff x="0" y="0"/>
-          <a:chExt cx="0" cy="0"/>
-        </a:xfrm>
-      </p:grpSpPr>
-      <p:sp>
-        <p:nvSpPr>
-          <p:cNvPr id="5" name="Title 4">
-            <a:extLst>
-              <a:ext uri="{FF2B5EF4-FFF2-40B4-BE49-F238E27FC236}">
-                <a16:creationId xmlns:a16="http://schemas.microsoft.com/office/drawing/2014/main" id="{1CF9FD79-8BDF-723A-BA1E-AC7C272FBCAB}"/>
-              </a:ext>
-            </a:extLst>
-          </p:cNvPr>
-          <p:cNvSpPr>
-            <a:spLocks noGrp="1"/>
-          </p:cNvSpPr>
-          <p:nvPr>
-            <p:ph type="title"/>
-          </p:nvPr>
-        </p:nvSpPr>
-        <p:spPr/>
-        <p:txBody>
-          <a:bodyPr/>
-          <a:lstStyle/>
-          <a:p>
-            <a:r>
-              <a:rPr lang="en-US" b="1" dirty="0">
-                <a:solidFill>
-                  <a:srgbClr val="C00000"/>
-                </a:solidFill>
-              </a:rPr>
-              <a:t>Peer Evaluation</a:t>
-            </a:r>
-          </a:p>
-        </p:txBody>
-      </p:sp>
-      <p:sp>
-        <p:nvSpPr>
-          <p:cNvPr id="6" name="Content Placeholder 5">
-            <a:extLst>
-              <a:ext uri="{FF2B5EF4-FFF2-40B4-BE49-F238E27FC236}">
-                <a16:creationId xmlns:a16="http://schemas.microsoft.com/office/drawing/2014/main" id="{E6EAE2D7-A0EC-D8F4-DF5D-B824AE89B4D5}"/>
-              </a:ext>
-            </a:extLst>
-          </p:cNvPr>
-          <p:cNvSpPr>
-            <a:spLocks noGrp="1"/>
-          </p:cNvSpPr>
-          <p:nvPr>
-            <p:ph idx="1"/>
-          </p:nvPr>
-        </p:nvSpPr>
-        <p:spPr>
-          <a:xfrm>
-            <a:off x="628650" y="1690689"/>
-            <a:ext cx="7886700" cy="4486274"/>
-          </a:xfrm>
-        </p:spPr>
-        <p:txBody>
-          <a:bodyPr>
-            <a:normAutofit/>
-          </a:bodyPr>
-          <a:lstStyle/>
-          <a:p>
-            <a:r>
-              <a:rPr lang="en-US" sz="2200" b="1" dirty="0"/>
-              <a:t>Forms</a:t>
-            </a:r>
-          </a:p>
-          <a:p>
-            <a:pPr lvl="1"/>
-            <a:r>
-              <a:rPr lang="en-US" sz="2200" dirty="0"/>
-              <a:t>Peer Evaluation due after the final report</a:t>
-            </a:r>
-          </a:p>
-          <a:p>
-            <a:pPr lvl="1"/>
-            <a:r>
-              <a:rPr lang="en-US" sz="2200" dirty="0"/>
-              <a:t>You will rate your performance on the project as well as teammates</a:t>
-            </a:r>
-          </a:p>
-          <a:p>
-            <a:r>
-              <a:rPr lang="en-US" sz="2200" b="1" dirty="0"/>
-              <a:t>A grade (12% of overall grade) determined using:</a:t>
-            </a:r>
-          </a:p>
-          <a:p>
-            <a:pPr lvl="1"/>
-            <a:r>
-              <a:rPr lang="en-US" sz="2200" dirty="0"/>
-              <a:t>Peer Evaluation ratings and comments</a:t>
-            </a:r>
-          </a:p>
-          <a:p>
-            <a:pPr lvl="1"/>
-            <a:r>
-              <a:rPr lang="en-US" sz="2200" dirty="0"/>
-              <a:t>Class attendance/tardiness/participation</a:t>
-            </a:r>
-          </a:p>
-          <a:p>
-            <a:pPr lvl="1"/>
-            <a:r>
-              <a:rPr lang="en-US" sz="2200" dirty="0"/>
-              <a:t>Instructors' observation of team participation/contribution</a:t>
-            </a:r>
-          </a:p>
-        </p:txBody>
-      </p:sp>
-      <p:sp>
-        <p:nvSpPr>
-          <p:cNvPr id="4" name="Slide Number Placeholder 3">
-            <a:extLst>
-              <a:ext uri="{FF2B5EF4-FFF2-40B4-BE49-F238E27FC236}">
-                <a16:creationId xmlns:a16="http://schemas.microsoft.com/office/drawing/2014/main" id="{C05CCFD4-EDD2-47EB-5E4C-A72840239372}"/>
-              </a:ext>
-            </a:extLst>
-          </p:cNvPr>
-          <p:cNvSpPr>
-            <a:spLocks noGrp="1"/>
-          </p:cNvSpPr>
-          <p:nvPr>
-            <p:ph type="sldNum" sz="quarter" idx="12"/>
-          </p:nvPr>
-        </p:nvSpPr>
-        <p:spPr/>
-        <p:txBody>
-          <a:bodyPr/>
-          <a:lstStyle/>
-          <a:p>
-            <a:fld id="{727B0ACA-53D9-FB44-A37C-A778C10B232A}" type="slidenum">
-              <a:rPr lang="en-US" smtClean="0"/>
-              <a:t>8</a:t>
-            </a:fld>
-            <a:endParaRPr lang="en-US"/>
-          </a:p>
-        </p:txBody>
-      </p:sp>
-    </p:spTree>
-    <p:extLst>
-      <p:ext uri="{BB962C8B-B14F-4D97-AF65-F5344CB8AC3E}">
-        <p14:creationId xmlns:p14="http://schemas.microsoft.com/office/powerpoint/2010/main" val="284714922"/>
       </p:ext>
     </p:extLst>
   </p:cSld>
@@ -8045,10 +8107,7 @@
     <p:bg>
       <p:bgPr>
         <a:solidFill>
-          <a:schemeClr val="accent6">
-            <a:lumMod val="40000"/>
-            <a:lumOff val="60000"/>
-          </a:schemeClr>
+          <a:schemeClr val="bg2"/>
         </a:solidFill>
         <a:effectLst/>
       </p:bgPr>
@@ -8058,7 +8117,7 @@
         <p:cNvPr id="1" name="">
           <a:extLst>
             <a:ext uri="{FF2B5EF4-FFF2-40B4-BE49-F238E27FC236}">
-              <a16:creationId xmlns:a16="http://schemas.microsoft.com/office/drawing/2014/main" id="{EC1A15D5-204B-CDC8-CD0B-5A7A1F98771F}"/>
+              <a16:creationId xmlns:a16="http://schemas.microsoft.com/office/drawing/2014/main" id="{1E264BFA-3889-EAB3-E5C6-0D05B1592796}"/>
             </a:ext>
           </a:extLst>
         </p:cNvPr>
@@ -8078,7 +8137,7 @@
           <p:cNvPr id="2" name="Title 1">
             <a:extLst>
               <a:ext uri="{FF2B5EF4-FFF2-40B4-BE49-F238E27FC236}">
-                <a16:creationId xmlns:a16="http://schemas.microsoft.com/office/drawing/2014/main" id="{5B3B5266-C482-2BE1-0271-68A87CD63769}"/>
+                <a16:creationId xmlns:a16="http://schemas.microsoft.com/office/drawing/2014/main" id="{9114EC51-C45A-DDBA-20FC-E1CCD69EF1BF}"/>
               </a:ext>
             </a:extLst>
           </p:cNvPr>
@@ -8097,10 +8156,83 @@
             <a:r>
               <a:rPr lang="en-US" b="1" dirty="0">
                 <a:solidFill>
-                  <a:srgbClr val="7030A0"/>
+                  <a:srgbClr val="C00000"/>
                 </a:solidFill>
               </a:rPr>
-              <a:t>Comms Activity</a:t>
+              <a:t>Standards </a:t>
+            </a:r>
+            <a:r>
+              <a:rPr lang="en-US" b="1" baseline="30000" dirty="0">
+                <a:solidFill>
+                  <a:srgbClr val="C00000"/>
+                </a:solidFill>
+              </a:rPr>
+              <a:t>(A Universal Language)</a:t>
+            </a:r>
+          </a:p>
+        </p:txBody>
+      </p:sp>
+      <p:sp>
+        <p:nvSpPr>
+          <p:cNvPr id="3" name="Content Placeholder 2">
+            <a:extLst>
+              <a:ext uri="{FF2B5EF4-FFF2-40B4-BE49-F238E27FC236}">
+                <a16:creationId xmlns:a16="http://schemas.microsoft.com/office/drawing/2014/main" id="{D87230FC-AE5B-4BB8-51CE-7E302E098782}"/>
+              </a:ext>
+            </a:extLst>
+          </p:cNvPr>
+          <p:cNvSpPr>
+            <a:spLocks noGrp="1"/>
+          </p:cNvSpPr>
+          <p:nvPr>
+            <p:ph idx="1"/>
+          </p:nvPr>
+        </p:nvSpPr>
+        <p:spPr>
+          <a:xfrm>
+            <a:off x="628650" y="1319514"/>
+            <a:ext cx="4660980" cy="5173360"/>
+          </a:xfrm>
+        </p:spPr>
+        <p:txBody>
+          <a:bodyPr anchor="ctr">
+            <a:normAutofit/>
+          </a:bodyPr>
+          <a:lstStyle/>
+          <a:p>
+            <a:r>
+              <a:rPr lang="en-US" sz="1800" dirty="0"/>
+              <a:t>Standards are the agreed-upon rules and technical specifications that ensure safety, reliability, and interoperability. Without them, your lightbulb might not fit into a socket made by a different company.</a:t>
+            </a:r>
+          </a:p>
+          <a:p>
+            <a:r>
+              <a:rPr lang="en-US" sz="1800" b="1" dirty="0"/>
+              <a:t>Safety &amp; Compliance</a:t>
+            </a:r>
+            <a:r>
+              <a:rPr lang="en-US" sz="1800" dirty="0"/>
+              <a:t>: Regulatory bodies (like OSHA or the FAA) mandate standards to prevent catastrophic failure and protect the public.</a:t>
+            </a:r>
+          </a:p>
+          <a:p>
+            <a:r>
+              <a:rPr lang="en-US" sz="1800" b="1" dirty="0"/>
+              <a:t>Interchangeability</a:t>
+            </a:r>
+            <a:r>
+              <a:rPr lang="en-US" sz="1800" dirty="0"/>
+              <a:t>: Standards like ISO or ASME ensure that parts from different global suppliers work together seamlessly.</a:t>
+            </a:r>
+          </a:p>
+          <a:p>
+            <a:r>
+              <a:rPr lang="en-US" sz="1800" b="1" dirty="0"/>
+              <a:t>Quality Benchmarks</a:t>
+            </a:r>
+            <a:r>
+              <a:rPr lang="en-US" sz="1800" dirty="0"/>
+              <a:t>: Following established standards provides a baseline for "what good looks like," reducing the risk of design flaws.</a:t>
             </a:r>
           </a:p>
         </p:txBody>
@@ -8110,7 +8242,7 @@
           <p:cNvPr id="4" name="Slide Number Placeholder 3">
             <a:extLst>
               <a:ext uri="{FF2B5EF4-FFF2-40B4-BE49-F238E27FC236}">
-                <a16:creationId xmlns:a16="http://schemas.microsoft.com/office/drawing/2014/main" id="{59BCF317-B36D-4A37-5EC1-D93FFC147ACC}"/>
+                <a16:creationId xmlns:a16="http://schemas.microsoft.com/office/drawing/2014/main" id="{8E135D74-250D-4627-CAFE-FE188C245AF5}"/>
               </a:ext>
             </a:extLst>
           </p:cNvPr>
@@ -8134,10 +8266,118 @@
           </a:p>
         </p:txBody>
       </p:sp>
+      <p:pic>
+        <p:nvPicPr>
+          <p:cNvPr id="6" name="Picture 5">
+            <a:extLst>
+              <a:ext uri="{FF2B5EF4-FFF2-40B4-BE49-F238E27FC236}">
+                <a16:creationId xmlns:a16="http://schemas.microsoft.com/office/drawing/2014/main" id="{FB3F4C90-689B-BA2E-0544-2E635C386967}"/>
+              </a:ext>
+            </a:extLst>
+          </p:cNvPr>
+          <p:cNvPicPr>
+            <a:picLocks noChangeAspect="1"/>
+          </p:cNvPicPr>
+          <p:nvPr/>
+        </p:nvPicPr>
+        <p:blipFill>
+          <a:blip r:embed="rId2"/>
+          <a:stretch>
+            <a:fillRect/>
+          </a:stretch>
+        </p:blipFill>
+        <p:spPr>
+          <a:xfrm>
+            <a:off x="5289630" y="1319514"/>
+            <a:ext cx="3657600" cy="3307563"/>
+          </a:xfrm>
+          <a:prstGeom prst="rect">
+            <a:avLst/>
+          </a:prstGeom>
+        </p:spPr>
+      </p:pic>
+      <p:sp>
+        <p:nvSpPr>
+          <p:cNvPr id="7" name="TextBox 6">
+            <a:extLst>
+              <a:ext uri="{FF2B5EF4-FFF2-40B4-BE49-F238E27FC236}">
+                <a16:creationId xmlns:a16="http://schemas.microsoft.com/office/drawing/2014/main" id="{8C038E26-178E-44F8-9AAE-BE0E18633A13}"/>
+              </a:ext>
+            </a:extLst>
+          </p:cNvPr>
+          <p:cNvSpPr txBox="1"/>
+          <p:nvPr/>
+        </p:nvSpPr>
+        <p:spPr>
+          <a:xfrm>
+            <a:off x="5289630" y="4627077"/>
+            <a:ext cx="3657600" cy="1569660"/>
+          </a:xfrm>
+          <a:prstGeom prst="rect">
+            <a:avLst/>
+          </a:prstGeom>
+          <a:noFill/>
+        </p:spPr>
+        <p:txBody>
+          <a:bodyPr wrap="square" rtlCol="0">
+            <a:spAutoFit/>
+          </a:bodyPr>
+          <a:lstStyle/>
+          <a:p>
+            <a:r>
+              <a:rPr lang="en-US" sz="1200" dirty="0"/>
+              <a:t>Screw standards define the dimensions, thread pitch, and tolerances for fasteners to ensure interchangeability and strength, with the two primary systems being the Unified Thread Standard (UTS/Imperial) in North America and ISO Metric worldwide. Key standards include ISO 68-1 for metric, and ASME B1.1 for unified inch threads (UNC/UNF).</a:t>
+            </a:r>
+          </a:p>
+        </p:txBody>
+      </p:sp>
+      <p:sp>
+        <p:nvSpPr>
+          <p:cNvPr id="5" name="TextBox 4">
+            <a:extLst>
+              <a:ext uri="{FF2B5EF4-FFF2-40B4-BE49-F238E27FC236}">
+                <a16:creationId xmlns:a16="http://schemas.microsoft.com/office/drawing/2014/main" id="{E866D17D-90CB-D0FC-4AD5-F96AE6BA4F2D}"/>
+              </a:ext>
+            </a:extLst>
+          </p:cNvPr>
+          <p:cNvSpPr txBox="1"/>
+          <p:nvPr/>
+        </p:nvSpPr>
+        <p:spPr>
+          <a:xfrm>
+            <a:off x="2134442" y="183151"/>
+            <a:ext cx="4875117" cy="369332"/>
+          </a:xfrm>
+          <a:prstGeom prst="rect">
+            <a:avLst/>
+          </a:prstGeom>
+          <a:noFill/>
+        </p:spPr>
+        <p:txBody>
+          <a:bodyPr wrap="none" rtlCol="0">
+            <a:spAutoFit/>
+          </a:bodyPr>
+          <a:lstStyle/>
+          <a:p>
+            <a:pPr algn="ctr"/>
+            <a:r>
+              <a:rPr lang="en-US" b="1" dirty="0">
+                <a:solidFill>
+                  <a:srgbClr val="00B0F0"/>
+                </a:solidFill>
+                <a:highlight>
+                  <a:srgbClr val="FFFF00"/>
+                </a:highlight>
+              </a:rPr>
+              <a:t>IT NEEDS TO BE REVIEWED IN ALL PROJECTS!</a:t>
+            </a:r>
+          </a:p>
+        </p:txBody>
+      </p:sp>
     </p:spTree>
     <p:extLst>
       <p:ext uri="{BB962C8B-B14F-4D97-AF65-F5344CB8AC3E}">
-        <p14:creationId xmlns:p14="http://schemas.microsoft.com/office/powerpoint/2010/main" val="3702063022"/>
+        <p14:creationId xmlns:p14="http://schemas.microsoft.com/office/powerpoint/2010/main" val="4104882973"/>
       </p:ext>
     </p:extLst>
   </p:cSld>
